--- a/decks/diagram-generation/How-Diagrams-Are-Generated-Technical.pptx
+++ b/decks/diagram-generation/How-Diagrams-Are-Generated-Technical.pptx
@@ -4,9 +4,6 @@
   <p:sldMasterIdLst>
     <p:sldMasterId id="2147483648" r:id="rId1"/>
   </p:sldMasterIdLst>
-  <p:notesMasterIdLst>
-    <p:notesMasterId r:id="rId18"/>
-  </p:notesMasterIdLst>
   <p:sldIdLst>
     <p:sldId id="256" r:id="rId2"/>
     <p:sldId id="257" r:id="rId3"/>
@@ -25,6 +22,9 @@
     <p:sldId id="270" r:id="rId16"/>
     <p:sldId id="271" r:id="rId17"/>
   </p:sldIdLst>
+  <p:notesMasterIdLst>
+    <p:notesMasterId r:id="rId18"/>
+  </p:notesMasterIdLst>
   <p:sldSz cx="12192000" cy="6858000"/>
   <p:notesSz cx="6858000" cy="12192000"/>
   <p:defaultTextStyle>
@@ -119,11 +119,6 @@
       </a:defRPr>
     </a:lvl9pPr>
   </p:defaultTextStyle>
-  <p:extLst>
-    <p:ext uri="{EFAFB233-063F-42B5-8137-9DF3F51BA10A}">
-      <p15:sldGuideLst xmlns:p15="http://schemas.microsoft.com/office/powerpoint/2012/main"/>
-    </p:ext>
-  </p:extLst>
 </p:presentation>
 </file>
 
@@ -149,10 +144,234 @@
           <a:chExt cx="0" cy="0"/>
         </a:xfrm>
       </p:grpSpPr>
+      <p:sp>
+        <p:nvSpPr>
+          <p:cNvPr id="2" name="Header Placeholder 1"/>
+          <p:cNvSpPr>
+            <a:spLocks noGrp="1"/>
+          </p:cNvSpPr>
+          <p:nvPr>
+            <p:ph type="hdr" sz="quarter"/>
+          </p:nvPr>
+        </p:nvSpPr>
+        <p:spPr>
+          <a:xfrm>
+            <a:off x="0" y="0"/>
+            <a:ext cx="2971800" cy="458788"/>
+          </a:xfrm>
+          <a:prstGeom prst="rect">
+            <a:avLst/>
+          </a:prstGeom>
+        </p:spPr>
+        <p:txBody>
+          <a:bodyPr vert="horz" lIns="91440" tIns="45720" rIns="91440" bIns="45720" rtlCol="0"/>
+          <a:lstStyle>
+            <a:lvl1pPr algn="l">
+              <a:defRPr sz="1200"/>
+            </a:lvl1pPr>
+          </a:lstStyle>
+          <a:p>
+            <a:endParaRPr lang="en-US"/>
+          </a:p>
+        </p:txBody>
+      </p:sp>
+      <p:sp>
+        <p:nvSpPr>
+          <p:cNvPr id="3" name="Date Placeholder 2"/>
+          <p:cNvSpPr>
+            <a:spLocks noGrp="1"/>
+          </p:cNvSpPr>
+          <p:nvPr>
+            <p:ph type="dt" idx="1"/>
+          </p:nvPr>
+        </p:nvSpPr>
+        <p:spPr>
+          <a:xfrm>
+            <a:off x="3884613" y="0"/>
+            <a:ext cx="2971800" cy="458788"/>
+          </a:xfrm>
+          <a:prstGeom prst="rect">
+            <a:avLst/>
+          </a:prstGeom>
+        </p:spPr>
+        <p:txBody>
+          <a:bodyPr vert="horz" lIns="91440" tIns="45720" rIns="91440" bIns="45720" rtlCol="0"/>
+          <a:lstStyle>
+            <a:lvl1pPr algn="r">
+              <a:defRPr sz="1200"/>
+            </a:lvl1pPr>
+          </a:lstStyle>
+          <a:p>
+            <a:fld id="{5282F153-3F37-0F45-9E97-73ACFA13230C}" type="datetimeFigureOut">
+              <a:rPr lang="en-US"/>
+              <a:t>7/23/19</a:t>
+            </a:fld>
+            <a:endParaRPr lang="en-US"/>
+          </a:p>
+        </p:txBody>
+      </p:sp>
+      <p:sp>
+        <p:nvSpPr>
+          <p:cNvPr id="4" name="Slide Image Placeholder 3"/>
+          <p:cNvSpPr>
+            <a:spLocks noGrp="1" noRot="1" noChangeAspect="1"/>
+          </p:cNvSpPr>
+          <p:nvPr>
+            <p:ph type="sldImg" idx="2"/>
+          </p:nvPr>
+        </p:nvSpPr>
+        <p:spPr>
+          <a:xfrm>
+            <a:off x="685800" y="1143000"/>
+            <a:ext cx="5486400" cy="3086100"/>
+          </a:xfrm>
+          <a:prstGeom prst="rect">
+            <a:avLst/>
+          </a:prstGeom>
+          <a:noFill/>
+          <a:ln w="12700">
+            <a:solidFill>
+              <a:prstClr val="black"/>
+            </a:solidFill>
+          </a:ln>
+        </p:spPr>
+        <p:txBody>
+          <a:bodyPr vert="horz" lIns="91440" tIns="45720" rIns="91440" bIns="45720" rtlCol="0" anchor="ctr"/>
+          <a:lstStyle/>
+          <a:p>
+            <a:endParaRPr lang="en-US"/>
+          </a:p>
+        </p:txBody>
+      </p:sp>
+      <p:sp>
+        <p:nvSpPr>
+          <p:cNvPr id="5" name="Notes Placeholder 4"/>
+          <p:cNvSpPr>
+            <a:spLocks noGrp="1"/>
+          </p:cNvSpPr>
+          <p:nvPr>
+            <p:ph type="body" sz="quarter" idx="3"/>
+          </p:nvPr>
+        </p:nvSpPr>
+        <p:spPr>
+          <a:xfrm>
+            <a:off x="685800" y="4400550"/>
+            <a:ext cx="5486400" cy="3600450"/>
+          </a:xfrm>
+          <a:prstGeom prst="rect">
+            <a:avLst/>
+          </a:prstGeom>
+        </p:spPr>
+        <p:txBody>
+          <a:bodyPr vert="horz" lIns="91440" tIns="45720" rIns="91440" bIns="45720" rtlCol="0"/>
+          <a:lstStyle/>
+          <a:p>
+            <a:pPr lvl="0"/>
+            <a:r>
+              <a:rPr lang="en-US"/>
+              <a:t>Click to edit Master text styles</a:t>
+            </a:r>
+          </a:p>
+          <a:p>
+            <a:pPr lvl="1"/>
+            <a:r>
+              <a:rPr lang="en-US"/>
+              <a:t>Second level</a:t>
+            </a:r>
+          </a:p>
+          <a:p>
+            <a:pPr lvl="2"/>
+            <a:r>
+              <a:rPr lang="en-US"/>
+              <a:t>Third level</a:t>
+            </a:r>
+          </a:p>
+          <a:p>
+            <a:pPr lvl="3"/>
+            <a:r>
+              <a:rPr lang="en-US"/>
+              <a:t>Fourth level</a:t>
+            </a:r>
+          </a:p>
+          <a:p>
+            <a:pPr lvl="4"/>
+            <a:r>
+              <a:rPr lang="en-US"/>
+              <a:t>Fifth level</a:t>
+            </a:r>
+          </a:p>
+        </p:txBody>
+      </p:sp>
+      <p:sp>
+        <p:nvSpPr>
+          <p:cNvPr id="6" name="Footer Placeholder 5"/>
+          <p:cNvSpPr>
+            <a:spLocks noGrp="1"/>
+          </p:cNvSpPr>
+          <p:nvPr>
+            <p:ph type="ftr" sz="quarter" idx="4"/>
+          </p:nvPr>
+        </p:nvSpPr>
+        <p:spPr>
+          <a:xfrm>
+            <a:off x="0" y="8685213"/>
+            <a:ext cx="2971800" cy="458787"/>
+          </a:xfrm>
+          <a:prstGeom prst="rect">
+            <a:avLst/>
+          </a:prstGeom>
+        </p:spPr>
+        <p:txBody>
+          <a:bodyPr vert="horz" lIns="91440" tIns="45720" rIns="91440" bIns="45720" rtlCol="0" anchor="b"/>
+          <a:lstStyle>
+            <a:lvl1pPr algn="l">
+              <a:defRPr sz="1200"/>
+            </a:lvl1pPr>
+          </a:lstStyle>
+          <a:p>
+            <a:endParaRPr lang="en-US"/>
+          </a:p>
+        </p:txBody>
+      </p:sp>
+      <p:sp>
+        <p:nvSpPr>
+          <p:cNvPr id="7" name="Slide Number Placeholder 6"/>
+          <p:cNvSpPr>
+            <a:spLocks noGrp="1"/>
+          </p:cNvSpPr>
+          <p:nvPr>
+            <p:ph type="sldNum" sz="quarter" idx="5"/>
+          </p:nvPr>
+        </p:nvSpPr>
+        <p:spPr>
+          <a:xfrm>
+            <a:off x="3884613" y="8685213"/>
+            <a:ext cx="2971800" cy="458787"/>
+          </a:xfrm>
+          <a:prstGeom prst="rect">
+            <a:avLst/>
+          </a:prstGeom>
+        </p:spPr>
+        <p:txBody>
+          <a:bodyPr vert="horz" lIns="91440" tIns="45720" rIns="91440" bIns="45720" rtlCol="0" anchor="b"/>
+          <a:lstStyle>
+            <a:lvl1pPr algn="r">
+              <a:defRPr sz="1200"/>
+            </a:lvl1pPr>
+          </a:lstStyle>
+          <a:p>
+            <a:fld id="{CE5E9CC1-C706-0F49-92D6-E571CC5EEA8F}" type="slidenum">
+              <a:rPr lang="en-US"/>
+              <a:t>‹#›</a:t>
+            </a:fld>
+            <a:endParaRPr lang="en-US"/>
+          </a:p>
+        </p:txBody>
+      </p:sp>
     </p:spTree>
     <p:extLst>
       <p:ext uri="{BB962C8B-B14F-4D97-AF65-F5344CB8AC3E}">
-        <p14:creationId xmlns:p14="http://schemas.microsoft.com/office/powerpoint/2010/main" val="3009257570"/>
+        <p14:creationId xmlns:p14="http://schemas.microsoft.com/office/powerpoint/2010/main" val="1024086991"/>
       </p:ext>
     </p:extLst>
   </p:cSld>
@@ -296,6 +515,10 @@
           <a:bodyPr/>
           <a:lstStyle/>
           <a:p>
+            <a:r>
+              <a:rPr lang="en-US" dirty="0"/>
+              <a:t/>
+            </a:r>
             <a:endParaRPr lang="en-US" dirty="0"/>
           </a:p>
         </p:txBody>
@@ -380,6 +603,10 @@
           <a:bodyPr/>
           <a:lstStyle/>
           <a:p>
+            <a:r>
+              <a:rPr lang="en-US" dirty="0"/>
+              <a:t/>
+            </a:r>
             <a:endParaRPr lang="en-US" dirty="0"/>
           </a:p>
         </p:txBody>
@@ -464,6 +691,10 @@
           <a:bodyPr/>
           <a:lstStyle/>
           <a:p>
+            <a:r>
+              <a:rPr lang="en-US" dirty="0"/>
+              <a:t/>
+            </a:r>
             <a:endParaRPr lang="en-US" dirty="0"/>
           </a:p>
         </p:txBody>
@@ -548,6 +779,10 @@
           <a:bodyPr/>
           <a:lstStyle/>
           <a:p>
+            <a:r>
+              <a:rPr lang="en-US" dirty="0"/>
+              <a:t/>
+            </a:r>
             <a:endParaRPr lang="en-US" dirty="0"/>
           </a:p>
         </p:txBody>
@@ -632,6 +867,10 @@
           <a:bodyPr/>
           <a:lstStyle/>
           <a:p>
+            <a:r>
+              <a:rPr lang="en-US" dirty="0"/>
+              <a:t/>
+            </a:r>
             <a:endParaRPr lang="en-US" dirty="0"/>
           </a:p>
         </p:txBody>
@@ -716,6 +955,10 @@
           <a:bodyPr/>
           <a:lstStyle/>
           <a:p>
+            <a:r>
+              <a:rPr lang="en-US" dirty="0"/>
+              <a:t/>
+            </a:r>
             <a:endParaRPr lang="en-US" dirty="0"/>
           </a:p>
         </p:txBody>
@@ -800,6 +1043,10 @@
           <a:bodyPr/>
           <a:lstStyle/>
           <a:p>
+            <a:r>
+              <a:rPr lang="en-US" dirty="0"/>
+              <a:t/>
+            </a:r>
             <a:endParaRPr lang="en-US" dirty="0"/>
           </a:p>
         </p:txBody>
@@ -884,6 +1131,10 @@
           <a:bodyPr/>
           <a:lstStyle/>
           <a:p>
+            <a:r>
+              <a:rPr lang="en-US" dirty="0"/>
+              <a:t/>
+            </a:r>
             <a:endParaRPr lang="en-US" dirty="0"/>
           </a:p>
         </p:txBody>
@@ -968,6 +1219,10 @@
           <a:bodyPr/>
           <a:lstStyle/>
           <a:p>
+            <a:r>
+              <a:rPr lang="en-US" dirty="0"/>
+              <a:t/>
+            </a:r>
             <a:endParaRPr lang="en-US" dirty="0"/>
           </a:p>
         </p:txBody>
@@ -1052,6 +1307,10 @@
           <a:bodyPr/>
           <a:lstStyle/>
           <a:p>
+            <a:r>
+              <a:rPr lang="en-US" dirty="0"/>
+              <a:t/>
+            </a:r>
             <a:endParaRPr lang="en-US" dirty="0"/>
           </a:p>
         </p:txBody>
@@ -1136,6 +1395,10 @@
           <a:bodyPr/>
           <a:lstStyle/>
           <a:p>
+            <a:r>
+              <a:rPr lang="en-US" dirty="0"/>
+              <a:t/>
+            </a:r>
             <a:endParaRPr lang="en-US" dirty="0"/>
           </a:p>
         </p:txBody>
@@ -1220,6 +1483,10 @@
           <a:bodyPr/>
           <a:lstStyle/>
           <a:p>
+            <a:r>
+              <a:rPr lang="en-US" dirty="0"/>
+              <a:t/>
+            </a:r>
             <a:endParaRPr lang="en-US" dirty="0"/>
           </a:p>
         </p:txBody>
@@ -1304,6 +1571,10 @@
           <a:bodyPr/>
           <a:lstStyle/>
           <a:p>
+            <a:r>
+              <a:rPr lang="en-US" dirty="0"/>
+              <a:t/>
+            </a:r>
             <a:endParaRPr lang="en-US" dirty="0"/>
           </a:p>
         </p:txBody>
@@ -1388,6 +1659,10 @@
           <a:bodyPr/>
           <a:lstStyle/>
           <a:p>
+            <a:r>
+              <a:rPr lang="en-US" dirty="0"/>
+              <a:t/>
+            </a:r>
             <a:endParaRPr lang="en-US" dirty="0"/>
           </a:p>
         </p:txBody>
@@ -1472,6 +1747,10 @@
           <a:bodyPr/>
           <a:lstStyle/>
           <a:p>
+            <a:r>
+              <a:rPr lang="en-US" dirty="0"/>
+              <a:t/>
+            </a:r>
             <a:endParaRPr lang="en-US" dirty="0"/>
           </a:p>
         </p:txBody>
@@ -1556,6 +1835,10 @@
           <a:bodyPr/>
           <a:lstStyle/>
           <a:p>
+            <a:r>
+              <a:rPr lang="en-US" dirty="0"/>
+              <a:t/>
+            </a:r>
             <a:endParaRPr lang="en-US" dirty="0"/>
           </a:p>
         </p:txBody>
@@ -1629,11 +1912,6 @@
 <file path=ppt/slideMasters/slideMaster1.xml><?xml version="1.0" encoding="utf-8"?>
 <p:sldMaster xmlns:a="http://schemas.openxmlformats.org/drawingml/2006/main" xmlns:r="http://schemas.openxmlformats.org/officeDocument/2006/relationships" xmlns:p="http://schemas.openxmlformats.org/presentationml/2006/main">
   <p:cSld>
-    <p:bg>
-      <p:bgRef idx="1001">
-        <a:schemeClr val="bg1"/>
-      </p:bgRef>
-    </p:bg>
     <p:spTree>
       <p:nvGrpSpPr>
         <p:cNvPr id="1" name=""/>
@@ -1916,7 +2194,6 @@
         <a:solidFill>
           <a:srgbClr val="0A0E24"/>
         </a:solidFill>
-        <a:effectLst/>
       </p:bgPr>
     </p:bg>
     <p:spTree>
@@ -1952,13 +2229,6 @@
           </a:solidFill>
           <a:ln/>
         </p:spPr>
-        <p:txBody>
-          <a:bodyPr/>
-          <a:lstStyle/>
-          <a:p>
-            <a:endParaRPr lang="en-US"/>
-          </a:p>
-        </p:txBody>
       </p:sp>
       <p:sp>
         <p:nvSpPr>
@@ -1979,13 +2249,6 @@
           </a:solidFill>
           <a:ln/>
         </p:spPr>
-        <p:txBody>
-          <a:bodyPr/>
-          <a:lstStyle/>
-          <a:p>
-            <a:endParaRPr lang="en-US"/>
-          </a:p>
-        </p:txBody>
       </p:sp>
       <p:sp>
         <p:nvSpPr>
@@ -2008,11 +2271,11 @@
           <a:bodyPr wrap="square" lIns="0" tIns="0" rIns="0" bIns="0" rtlCol="0" anchor="ctr"/>
           <a:lstStyle/>
           <a:p>
-            <a:pPr marL="0" indent="0">
-              <a:buNone/>
-            </a:pPr>
-            <a:r>
-              <a:rPr lang="en-US" sz="1300" kern="0" spc="300" dirty="0">
+            <a:pPr indent="0" marL="0">
+              <a:buNone/>
+            </a:pPr>
+            <a:r>
+              <a:rPr lang="en-US" sz="1300" spc="300" kern="0" dirty="0">
                 <a:solidFill>
                   <a:srgbClr val="2FD1C0"/>
                 </a:solidFill>
@@ -2047,7 +2310,7 @@
           <a:bodyPr wrap="square" lIns="0" tIns="0" rIns="0" bIns="0" rtlCol="0" anchor="ctr"/>
           <a:lstStyle/>
           <a:p>
-            <a:pPr marL="0" indent="0">
+            <a:pPr indent="0" marL="0">
               <a:buNone/>
             </a:pPr>
             <a:r>
@@ -2086,7 +2349,7 @@
           <a:bodyPr wrap="square" lIns="0" tIns="0" rIns="0" bIns="0" rtlCol="0" anchor="ctr"/>
           <a:lstStyle/>
           <a:p>
-            <a:pPr marL="0" indent="0">
+            <a:pPr indent="0" marL="0">
               <a:buNone/>
             </a:pPr>
             <a:r>
@@ -2123,13 +2386,6 @@
           </a:solidFill>
           <a:ln/>
         </p:spPr>
-        <p:txBody>
-          <a:bodyPr/>
-          <a:lstStyle/>
-          <a:p>
-            <a:endParaRPr lang="en-US"/>
-          </a:p>
-        </p:txBody>
       </p:sp>
       <p:sp>
         <p:nvSpPr>
@@ -2152,7 +2408,7 @@
           <a:bodyPr wrap="square" lIns="0" tIns="0" rIns="0" bIns="0" rtlCol="0" anchor="ctr"/>
           <a:lstStyle/>
           <a:p>
-            <a:pPr marL="0" indent="0">
+            <a:pPr indent="0" marL="0">
               <a:buNone/>
             </a:pPr>
             <a:r>
@@ -2189,13 +2445,6 @@
           </a:solidFill>
           <a:ln/>
         </p:spPr>
-        <p:txBody>
-          <a:bodyPr/>
-          <a:lstStyle/>
-          <a:p>
-            <a:endParaRPr lang="en-US"/>
-          </a:p>
-        </p:txBody>
       </p:sp>
       <p:sp>
         <p:nvSpPr>
@@ -2218,7 +2467,7 @@
           <a:bodyPr wrap="square" lIns="0" tIns="0" rIns="0" bIns="0" rtlCol="0" anchor="ctr"/>
           <a:lstStyle/>
           <a:p>
-            <a:pPr marL="0" indent="0">
+            <a:pPr indent="0" marL="0">
               <a:buNone/>
             </a:pPr>
             <a:r>
@@ -2257,7 +2506,7 @@
           <a:bodyPr wrap="square" lIns="0" tIns="0" rIns="0" bIns="0" rtlCol="0" anchor="ctr"/>
           <a:lstStyle/>
           <a:p>
-            <a:pPr marL="0" indent="0">
+            <a:pPr indent="0" marL="0">
               <a:buNone/>
             </a:pPr>
             <a:r>
@@ -2271,6 +2520,9 @@
               </a:rPr>
               <a:t>Technical walkthrough for AI PSAs</a:t>
             </a:r>
+            <a:pPr indent="0" marL="0">
+              <a:buNone/>
+            </a:pPr>
             <a:r>
               <a:rPr lang="en-US" sz="1250" dirty="0">
                 <a:solidFill>
@@ -2302,7 +2554,6 @@
         <a:solidFill>
           <a:srgbClr val="0E1330"/>
         </a:solidFill>
-        <a:effectLst/>
       </p:bgPr>
     </p:bg>
     <p:spTree>
@@ -2338,13 +2589,6 @@
           </a:solidFill>
           <a:ln/>
         </p:spPr>
-        <p:txBody>
-          <a:bodyPr/>
-          <a:lstStyle/>
-          <a:p>
-            <a:endParaRPr lang="en-US"/>
-          </a:p>
-        </p:txBody>
       </p:sp>
       <p:sp>
         <p:nvSpPr>
@@ -2365,13 +2609,6 @@
           </a:solidFill>
           <a:ln/>
         </p:spPr>
-        <p:txBody>
-          <a:bodyPr/>
-          <a:lstStyle/>
-          <a:p>
-            <a:endParaRPr lang="en-US"/>
-          </a:p>
-        </p:txBody>
       </p:sp>
       <p:sp>
         <p:nvSpPr>
@@ -2392,13 +2629,6 @@
           </a:solidFill>
           <a:ln/>
         </p:spPr>
-        <p:txBody>
-          <a:bodyPr/>
-          <a:lstStyle/>
-          <a:p>
-            <a:endParaRPr lang="en-US"/>
-          </a:p>
-        </p:txBody>
       </p:sp>
       <p:sp>
         <p:nvSpPr>
@@ -2419,13 +2649,6 @@
           </a:solidFill>
           <a:ln/>
         </p:spPr>
-        <p:txBody>
-          <a:bodyPr/>
-          <a:lstStyle/>
-          <a:p>
-            <a:endParaRPr lang="en-US"/>
-          </a:p>
-        </p:txBody>
       </p:sp>
       <p:sp>
         <p:nvSpPr>
@@ -2446,13 +2669,6 @@
           </a:solidFill>
           <a:ln/>
         </p:spPr>
-        <p:txBody>
-          <a:bodyPr/>
-          <a:lstStyle/>
-          <a:p>
-            <a:endParaRPr lang="en-US"/>
-          </a:p>
-        </p:txBody>
       </p:sp>
       <p:sp>
         <p:nvSpPr>
@@ -2473,13 +2689,6 @@
           </a:solidFill>
           <a:ln/>
         </p:spPr>
-        <p:txBody>
-          <a:bodyPr/>
-          <a:lstStyle/>
-          <a:p>
-            <a:endParaRPr lang="en-US"/>
-          </a:p>
-        </p:txBody>
       </p:sp>
       <p:sp>
         <p:nvSpPr>
@@ -2500,13 +2709,6 @@
           </a:solidFill>
           <a:ln/>
         </p:spPr>
-        <p:txBody>
-          <a:bodyPr/>
-          <a:lstStyle/>
-          <a:p>
-            <a:endParaRPr lang="en-US"/>
-          </a:p>
-        </p:txBody>
       </p:sp>
       <p:sp>
         <p:nvSpPr>
@@ -2527,13 +2729,6 @@
           </a:solidFill>
           <a:ln/>
         </p:spPr>
-        <p:txBody>
-          <a:bodyPr/>
-          <a:lstStyle/>
-          <a:p>
-            <a:endParaRPr lang="en-US"/>
-          </a:p>
-        </p:txBody>
       </p:sp>
       <p:sp>
         <p:nvSpPr>
@@ -2554,13 +2749,6 @@
           </a:solidFill>
           <a:ln/>
         </p:spPr>
-        <p:txBody>
-          <a:bodyPr/>
-          <a:lstStyle/>
-          <a:p>
-            <a:endParaRPr lang="en-US"/>
-          </a:p>
-        </p:txBody>
       </p:sp>
       <p:sp>
         <p:nvSpPr>
@@ -2581,13 +2769,6 @@
           </a:solidFill>
           <a:ln/>
         </p:spPr>
-        <p:txBody>
-          <a:bodyPr/>
-          <a:lstStyle/>
-          <a:p>
-            <a:endParaRPr lang="en-US"/>
-          </a:p>
-        </p:txBody>
       </p:sp>
       <p:sp>
         <p:nvSpPr>
@@ -2610,11 +2791,11 @@
           <a:bodyPr wrap="square" lIns="0" tIns="0" rIns="0" bIns="0" rtlCol="0" anchor="ctr"/>
           <a:lstStyle/>
           <a:p>
-            <a:pPr marL="0" indent="0" algn="l">
-              <a:buNone/>
-            </a:pPr>
-            <a:r>
-              <a:rPr lang="en-US" sz="1100" b="1" kern="0" spc="100" dirty="0">
+            <a:pPr algn="l" indent="0" marL="0">
+              <a:buNone/>
+            </a:pPr>
+            <a:r>
+              <a:rPr lang="en-US" sz="1100" b="1" spc="100" kern="0" dirty="0">
                 <a:solidFill>
                   <a:srgbClr val="2FD1C0"/>
                 </a:solidFill>
@@ -2624,8 +2805,11 @@
               </a:rPr>
               <a:t>STAGE 07  </a:t>
             </a:r>
-            <a:r>
-              <a:rPr lang="en-US" sz="1100" kern="0" spc="100" dirty="0">
+            <a:pPr algn="l" indent="0" marL="0">
+              <a:buNone/>
+            </a:pPr>
+            <a:r>
+              <a:rPr lang="en-US" sz="1100" spc="100" kern="0" dirty="0">
                 <a:solidFill>
                   <a:srgbClr val="99A2CC"/>
                 </a:solidFill>
@@ -2660,7 +2844,7 @@
           <a:bodyPr wrap="square" lIns="0" tIns="0" rIns="0" bIns="0" rtlCol="0" anchor="ctr"/>
           <a:lstStyle/>
           <a:p>
-            <a:pPr marL="0" indent="0">
+            <a:pPr indent="0" marL="0">
               <a:buNone/>
             </a:pPr>
             <a:r>
@@ -2696,7 +2880,7 @@
           <a:ln/>
         </p:spPr>
         <p:txBody>
-          <a:bodyPr wrap="square" lIns="0" tIns="0" rIns="0" bIns="0" rtlCol="0" anchor="ctr"/>
+          <a:bodyPr wrap="square" lIns="0" tIns="0" rIns="0" bIns="0" rtlCol="0" anchor="t"/>
           <a:lstStyle/>
           <a:p>
             <a:pPr marL="342900" indent="-342900">
@@ -2831,13 +3015,6 @@
             <a:prstDash val="solid"/>
           </a:ln>
         </p:spPr>
-        <p:txBody>
-          <a:bodyPr/>
-          <a:lstStyle/>
-          <a:p>
-            <a:endParaRPr lang="en-US"/>
-          </a:p>
-        </p:txBody>
       </p:sp>
       <p:sp>
         <p:nvSpPr>
@@ -2860,11 +3037,11 @@
           <a:bodyPr wrap="square" lIns="0" tIns="0" rIns="0" bIns="0" rtlCol="0" anchor="ctr"/>
           <a:lstStyle/>
           <a:p>
-            <a:pPr marL="0" indent="0">
-              <a:buNone/>
-            </a:pPr>
-            <a:r>
-              <a:rPr lang="en-US" sz="1050" kern="0" spc="100" dirty="0">
+            <a:pPr indent="0" marL="0">
+              <a:buNone/>
+            </a:pPr>
+            <a:r>
+              <a:rPr lang="en-US" sz="1050" spc="100" kern="0" dirty="0">
                 <a:solidFill>
                   <a:srgbClr val="2FD1C0"/>
                 </a:solidFill>
@@ -2900,13 +3077,6 @@
             <a:prstDash val="solid"/>
           </a:ln>
         </p:spPr>
-        <p:txBody>
-          <a:bodyPr/>
-          <a:lstStyle/>
-          <a:p>
-            <a:endParaRPr lang="en-US"/>
-          </a:p>
-        </p:txBody>
       </p:sp>
       <p:sp>
         <p:nvSpPr>
@@ -2926,10 +3096,10 @@
           <a:ln/>
         </p:spPr>
         <p:txBody>
-          <a:bodyPr wrap="square" lIns="0" tIns="0" rIns="0" bIns="0" rtlCol="0" anchor="ctr"/>
-          <a:lstStyle/>
-          <a:p>
-            <a:pPr marL="0" indent="0">
+          <a:bodyPr wrap="square" lIns="0" tIns="0" rIns="0" bIns="0" rtlCol="0" anchor="t"/>
+          <a:lstStyle/>
+          <a:p>
+            <a:pPr indent="0" marL="0">
               <a:lnSpc>
                 <a:spcPct val="112000"/>
               </a:lnSpc>
@@ -2949,7 +3119,7 @@
             <a:endParaRPr lang="en-US" sz="1000" dirty="0"/>
           </a:p>
           <a:p>
-            <a:pPr marL="0" indent="0">
+            <a:pPr indent="0" marL="0">
               <a:lnSpc>
                 <a:spcPct val="112000"/>
               </a:lnSpc>
@@ -2969,7 +3139,7 @@
             <a:endParaRPr lang="en-US" sz="1000" dirty="0"/>
           </a:p>
           <a:p>
-            <a:pPr marL="0" indent="0">
+            <a:pPr indent="0" marL="0">
               <a:lnSpc>
                 <a:spcPct val="112000"/>
               </a:lnSpc>
@@ -2989,7 +3159,7 @@
             <a:endParaRPr lang="en-US" sz="1000" dirty="0"/>
           </a:p>
           <a:p>
-            <a:pPr marL="0" indent="0">
+            <a:pPr indent="0" marL="0">
               <a:lnSpc>
                 <a:spcPct val="112000"/>
               </a:lnSpc>
@@ -3009,7 +3179,7 @@
             <a:endParaRPr lang="en-US" sz="1000" dirty="0"/>
           </a:p>
           <a:p>
-            <a:pPr marL="0" indent="0">
+            <a:pPr indent="0" marL="0">
               <a:lnSpc>
                 <a:spcPct val="112000"/>
               </a:lnSpc>
@@ -3029,7 +3199,7 @@
             <a:endParaRPr lang="en-US" sz="1000" dirty="0"/>
           </a:p>
           <a:p>
-            <a:pPr marL="0" indent="0">
+            <a:pPr indent="0" marL="0">
               <a:lnSpc>
                 <a:spcPct val="112000"/>
               </a:lnSpc>
@@ -3049,7 +3219,7 @@
             <a:endParaRPr lang="en-US" sz="1000" dirty="0"/>
           </a:p>
           <a:p>
-            <a:pPr marL="0" indent="0">
+            <a:pPr indent="0" marL="0">
               <a:lnSpc>
                 <a:spcPct val="112000"/>
               </a:lnSpc>
@@ -3069,7 +3239,7 @@
             <a:endParaRPr lang="en-US" sz="1000" dirty="0"/>
           </a:p>
           <a:p>
-            <a:pPr marL="0" indent="0">
+            <a:pPr indent="0" marL="0">
               <a:lnSpc>
                 <a:spcPct val="112000"/>
               </a:lnSpc>
@@ -3089,7 +3259,7 @@
             <a:endParaRPr lang="en-US" sz="1000" dirty="0"/>
           </a:p>
           <a:p>
-            <a:pPr marL="0" indent="0">
+            <a:pPr indent="0" marL="0">
               <a:lnSpc>
                 <a:spcPct val="112000"/>
               </a:lnSpc>
@@ -3109,7 +3279,7 @@
             <a:endParaRPr lang="en-US" sz="1000" dirty="0"/>
           </a:p>
           <a:p>
-            <a:pPr marL="0" indent="0">
+            <a:pPr indent="0" marL="0">
               <a:lnSpc>
                 <a:spcPct val="112000"/>
               </a:lnSpc>
@@ -3151,7 +3321,7 @@
           <a:bodyPr wrap="square" lIns="0" tIns="0" rIns="0" bIns="0" rtlCol="0" anchor="ctr"/>
           <a:lstStyle/>
           <a:p>
-            <a:pPr marL="0" indent="0" algn="l">
+            <a:pPr algn="l" indent="0" marL="0">
               <a:buNone/>
             </a:pPr>
             <a:r>
@@ -3190,7 +3360,7 @@
           <a:bodyPr wrap="square" lIns="0" tIns="0" rIns="0" bIns="0" rtlCol="0" anchor="ctr"/>
           <a:lstStyle/>
           <a:p>
-            <a:pPr marL="0" indent="0" algn="r">
+            <a:pPr algn="r" indent="0" marL="0">
               <a:buNone/>
             </a:pPr>
             <a:r>
@@ -3224,7 +3394,6 @@
         <a:solidFill>
           <a:srgbClr val="0E1330"/>
         </a:solidFill>
-        <a:effectLst/>
       </p:bgPr>
     </p:bg>
     <p:spTree>
@@ -3260,13 +3429,6 @@
           </a:solidFill>
           <a:ln/>
         </p:spPr>
-        <p:txBody>
-          <a:bodyPr/>
-          <a:lstStyle/>
-          <a:p>
-            <a:endParaRPr lang="en-US"/>
-          </a:p>
-        </p:txBody>
       </p:sp>
       <p:sp>
         <p:nvSpPr>
@@ -3287,13 +3449,6 @@
           </a:solidFill>
           <a:ln/>
         </p:spPr>
-        <p:txBody>
-          <a:bodyPr/>
-          <a:lstStyle/>
-          <a:p>
-            <a:endParaRPr lang="en-US"/>
-          </a:p>
-        </p:txBody>
       </p:sp>
       <p:sp>
         <p:nvSpPr>
@@ -3314,13 +3469,6 @@
           </a:solidFill>
           <a:ln/>
         </p:spPr>
-        <p:txBody>
-          <a:bodyPr/>
-          <a:lstStyle/>
-          <a:p>
-            <a:endParaRPr lang="en-US"/>
-          </a:p>
-        </p:txBody>
       </p:sp>
       <p:sp>
         <p:nvSpPr>
@@ -3341,13 +3489,6 @@
           </a:solidFill>
           <a:ln/>
         </p:spPr>
-        <p:txBody>
-          <a:bodyPr/>
-          <a:lstStyle/>
-          <a:p>
-            <a:endParaRPr lang="en-US"/>
-          </a:p>
-        </p:txBody>
       </p:sp>
       <p:sp>
         <p:nvSpPr>
@@ -3368,13 +3509,6 @@
           </a:solidFill>
           <a:ln/>
         </p:spPr>
-        <p:txBody>
-          <a:bodyPr/>
-          <a:lstStyle/>
-          <a:p>
-            <a:endParaRPr lang="en-US"/>
-          </a:p>
-        </p:txBody>
       </p:sp>
       <p:sp>
         <p:nvSpPr>
@@ -3395,13 +3529,6 @@
           </a:solidFill>
           <a:ln/>
         </p:spPr>
-        <p:txBody>
-          <a:bodyPr/>
-          <a:lstStyle/>
-          <a:p>
-            <a:endParaRPr lang="en-US"/>
-          </a:p>
-        </p:txBody>
       </p:sp>
       <p:sp>
         <p:nvSpPr>
@@ -3422,13 +3549,6 @@
           </a:solidFill>
           <a:ln/>
         </p:spPr>
-        <p:txBody>
-          <a:bodyPr/>
-          <a:lstStyle/>
-          <a:p>
-            <a:endParaRPr lang="en-US"/>
-          </a:p>
-        </p:txBody>
       </p:sp>
       <p:sp>
         <p:nvSpPr>
@@ -3449,13 +3569,6 @@
           </a:solidFill>
           <a:ln/>
         </p:spPr>
-        <p:txBody>
-          <a:bodyPr/>
-          <a:lstStyle/>
-          <a:p>
-            <a:endParaRPr lang="en-US"/>
-          </a:p>
-        </p:txBody>
       </p:sp>
       <p:sp>
         <p:nvSpPr>
@@ -3476,13 +3589,6 @@
           </a:solidFill>
           <a:ln/>
         </p:spPr>
-        <p:txBody>
-          <a:bodyPr/>
-          <a:lstStyle/>
-          <a:p>
-            <a:endParaRPr lang="en-US"/>
-          </a:p>
-        </p:txBody>
       </p:sp>
       <p:sp>
         <p:nvSpPr>
@@ -3503,13 +3609,6 @@
           </a:solidFill>
           <a:ln/>
         </p:spPr>
-        <p:txBody>
-          <a:bodyPr/>
-          <a:lstStyle/>
-          <a:p>
-            <a:endParaRPr lang="en-US"/>
-          </a:p>
-        </p:txBody>
       </p:sp>
       <p:sp>
         <p:nvSpPr>
@@ -3532,11 +3631,11 @@
           <a:bodyPr wrap="square" lIns="0" tIns="0" rIns="0" bIns="0" rtlCol="0" anchor="ctr"/>
           <a:lstStyle/>
           <a:p>
-            <a:pPr marL="0" indent="0" algn="l">
-              <a:buNone/>
-            </a:pPr>
-            <a:r>
-              <a:rPr lang="en-US" sz="1100" b="1" kern="0" spc="100" dirty="0">
+            <a:pPr algn="l" indent="0" marL="0">
+              <a:buNone/>
+            </a:pPr>
+            <a:r>
+              <a:rPr lang="en-US" sz="1100" b="1" spc="100" kern="0" dirty="0">
                 <a:solidFill>
                   <a:srgbClr val="2FD1C0"/>
                 </a:solidFill>
@@ -3546,8 +3645,11 @@
               </a:rPr>
               <a:t>STAGE 08  </a:t>
             </a:r>
-            <a:r>
-              <a:rPr lang="en-US" sz="1100" kern="0" spc="100" dirty="0">
+            <a:pPr algn="l" indent="0" marL="0">
+              <a:buNone/>
+            </a:pPr>
+            <a:r>
+              <a:rPr lang="en-US" sz="1100" spc="100" kern="0" dirty="0">
                 <a:solidFill>
                   <a:srgbClr val="99A2CC"/>
                 </a:solidFill>
@@ -3582,7 +3684,7 @@
           <a:bodyPr wrap="square" lIns="0" tIns="0" rIns="0" bIns="0" rtlCol="0" anchor="ctr"/>
           <a:lstStyle/>
           <a:p>
-            <a:pPr marL="0" indent="0">
+            <a:pPr indent="0" marL="0">
               <a:buNone/>
             </a:pPr>
             <a:r>
@@ -3618,7 +3720,7 @@
           <a:ln/>
         </p:spPr>
         <p:txBody>
-          <a:bodyPr wrap="square" lIns="0" tIns="0" rIns="0" bIns="0" rtlCol="0" anchor="ctr"/>
+          <a:bodyPr wrap="square" lIns="0" tIns="0" rIns="0" bIns="0" rtlCol="0" anchor="t"/>
           <a:lstStyle/>
           <a:p>
             <a:pPr marL="342900" indent="-342900">
@@ -3663,7 +3765,7 @@
             <a:endParaRPr lang="en-US" sz="1500" dirty="0"/>
           </a:p>
           <a:p>
-            <a:pPr marL="685800" lvl="1" indent="-342900">
+            <a:pPr lvl="1" marL="685800" indent="-342900">
               <a:lnSpc>
                 <a:spcPct val="128000"/>
               </a:lnSpc>
@@ -3753,13 +3855,6 @@
             <a:prstDash val="solid"/>
           </a:ln>
         </p:spPr>
-        <p:txBody>
-          <a:bodyPr/>
-          <a:lstStyle/>
-          <a:p>
-            <a:endParaRPr lang="en-US"/>
-          </a:p>
-        </p:txBody>
       </p:sp>
       <p:sp>
         <p:nvSpPr>
@@ -3782,11 +3877,11 @@
           <a:bodyPr wrap="square" lIns="0" tIns="0" rIns="0" bIns="0" rtlCol="0" anchor="ctr"/>
           <a:lstStyle/>
           <a:p>
-            <a:pPr marL="0" indent="0">
-              <a:buNone/>
-            </a:pPr>
-            <a:r>
-              <a:rPr lang="en-US" sz="1050" kern="0" spc="100" dirty="0">
+            <a:pPr indent="0" marL="0">
+              <a:buNone/>
+            </a:pPr>
+            <a:r>
+              <a:rPr lang="en-US" sz="1050" spc="100" kern="0" dirty="0">
                 <a:solidFill>
                   <a:srgbClr val="2FD1C0"/>
                 </a:solidFill>
@@ -3822,13 +3917,6 @@
             <a:prstDash val="solid"/>
           </a:ln>
         </p:spPr>
-        <p:txBody>
-          <a:bodyPr/>
-          <a:lstStyle/>
-          <a:p>
-            <a:endParaRPr lang="en-US"/>
-          </a:p>
-        </p:txBody>
       </p:sp>
       <p:sp>
         <p:nvSpPr>
@@ -3848,10 +3936,10 @@
           <a:ln/>
         </p:spPr>
         <p:txBody>
-          <a:bodyPr wrap="square" lIns="0" tIns="0" rIns="0" bIns="0" rtlCol="0" anchor="ctr"/>
-          <a:lstStyle/>
-          <a:p>
-            <a:pPr marL="0" indent="0">
+          <a:bodyPr wrap="square" lIns="0" tIns="0" rIns="0" bIns="0" rtlCol="0" anchor="t"/>
+          <a:lstStyle/>
+          <a:p>
+            <a:pPr indent="0" marL="0">
               <a:lnSpc>
                 <a:spcPct val="112000"/>
               </a:lnSpc>
@@ -3871,7 +3959,7 @@
             <a:endParaRPr lang="en-US" sz="1000" dirty="0"/>
           </a:p>
           <a:p>
-            <a:pPr marL="0" indent="0">
+            <a:pPr indent="0" marL="0">
               <a:lnSpc>
                 <a:spcPct val="112000"/>
               </a:lnSpc>
@@ -3891,7 +3979,7 @@
             <a:endParaRPr lang="en-US" sz="1000" dirty="0"/>
           </a:p>
           <a:p>
-            <a:pPr marL="0" indent="0">
+            <a:pPr indent="0" marL="0">
               <a:lnSpc>
                 <a:spcPct val="112000"/>
               </a:lnSpc>
@@ -3911,7 +3999,7 @@
             <a:endParaRPr lang="en-US" sz="1000" dirty="0"/>
           </a:p>
           <a:p>
-            <a:pPr marL="0" indent="0">
+            <a:pPr indent="0" marL="0">
               <a:lnSpc>
                 <a:spcPct val="112000"/>
               </a:lnSpc>
@@ -3920,7 +4008,7 @@
             <a:endParaRPr lang="en-US" sz="1000" dirty="0"/>
           </a:p>
           <a:p>
-            <a:pPr marL="0" indent="0">
+            <a:pPr indent="0" marL="0">
               <a:lnSpc>
                 <a:spcPct val="112000"/>
               </a:lnSpc>
@@ -3940,7 +4028,7 @@
             <a:endParaRPr lang="en-US" sz="1000" dirty="0"/>
           </a:p>
           <a:p>
-            <a:pPr marL="0" indent="0">
+            <a:pPr indent="0" marL="0">
               <a:lnSpc>
                 <a:spcPct val="112000"/>
               </a:lnSpc>
@@ -3960,7 +4048,7 @@
             <a:endParaRPr lang="en-US" sz="1000" dirty="0"/>
           </a:p>
           <a:p>
-            <a:pPr marL="0" indent="0">
+            <a:pPr indent="0" marL="0">
               <a:lnSpc>
                 <a:spcPct val="112000"/>
               </a:lnSpc>
@@ -3980,7 +4068,7 @@
             <a:endParaRPr lang="en-US" sz="1000" dirty="0"/>
           </a:p>
           <a:p>
-            <a:pPr marL="0" indent="0">
+            <a:pPr indent="0" marL="0">
               <a:lnSpc>
                 <a:spcPct val="112000"/>
               </a:lnSpc>
@@ -4022,7 +4110,7 @@
           <a:bodyPr wrap="square" lIns="0" tIns="0" rIns="0" bIns="0" rtlCol="0" anchor="ctr"/>
           <a:lstStyle/>
           <a:p>
-            <a:pPr marL="0" indent="0" algn="l">
+            <a:pPr algn="l" indent="0" marL="0">
               <a:buNone/>
             </a:pPr>
             <a:r>
@@ -4061,7 +4149,7 @@
           <a:bodyPr wrap="square" lIns="0" tIns="0" rIns="0" bIns="0" rtlCol="0" anchor="ctr"/>
           <a:lstStyle/>
           <a:p>
-            <a:pPr marL="0" indent="0" algn="r">
+            <a:pPr algn="r" indent="0" marL="0">
               <a:buNone/>
             </a:pPr>
             <a:r>
@@ -4095,7 +4183,6 @@
         <a:solidFill>
           <a:srgbClr val="0E1330"/>
         </a:solidFill>
-        <a:effectLst/>
       </p:bgPr>
     </p:bg>
     <p:spTree>
@@ -4131,13 +4218,6 @@
           </a:solidFill>
           <a:ln/>
         </p:spPr>
-        <p:txBody>
-          <a:bodyPr/>
-          <a:lstStyle/>
-          <a:p>
-            <a:endParaRPr lang="en-US"/>
-          </a:p>
-        </p:txBody>
       </p:sp>
       <p:sp>
         <p:nvSpPr>
@@ -4158,13 +4238,6 @@
           </a:solidFill>
           <a:ln/>
         </p:spPr>
-        <p:txBody>
-          <a:bodyPr/>
-          <a:lstStyle/>
-          <a:p>
-            <a:endParaRPr lang="en-US"/>
-          </a:p>
-        </p:txBody>
       </p:sp>
       <p:sp>
         <p:nvSpPr>
@@ -4185,13 +4258,6 @@
           </a:solidFill>
           <a:ln/>
         </p:spPr>
-        <p:txBody>
-          <a:bodyPr/>
-          <a:lstStyle/>
-          <a:p>
-            <a:endParaRPr lang="en-US"/>
-          </a:p>
-        </p:txBody>
       </p:sp>
       <p:sp>
         <p:nvSpPr>
@@ -4212,13 +4278,6 @@
           </a:solidFill>
           <a:ln/>
         </p:spPr>
-        <p:txBody>
-          <a:bodyPr/>
-          <a:lstStyle/>
-          <a:p>
-            <a:endParaRPr lang="en-US"/>
-          </a:p>
-        </p:txBody>
       </p:sp>
       <p:sp>
         <p:nvSpPr>
@@ -4239,13 +4298,6 @@
           </a:solidFill>
           <a:ln/>
         </p:spPr>
-        <p:txBody>
-          <a:bodyPr/>
-          <a:lstStyle/>
-          <a:p>
-            <a:endParaRPr lang="en-US"/>
-          </a:p>
-        </p:txBody>
       </p:sp>
       <p:sp>
         <p:nvSpPr>
@@ -4266,13 +4318,6 @@
           </a:solidFill>
           <a:ln/>
         </p:spPr>
-        <p:txBody>
-          <a:bodyPr/>
-          <a:lstStyle/>
-          <a:p>
-            <a:endParaRPr lang="en-US"/>
-          </a:p>
-        </p:txBody>
       </p:sp>
       <p:sp>
         <p:nvSpPr>
@@ -4293,13 +4338,6 @@
           </a:solidFill>
           <a:ln/>
         </p:spPr>
-        <p:txBody>
-          <a:bodyPr/>
-          <a:lstStyle/>
-          <a:p>
-            <a:endParaRPr lang="en-US"/>
-          </a:p>
-        </p:txBody>
       </p:sp>
       <p:sp>
         <p:nvSpPr>
@@ -4320,13 +4358,6 @@
           </a:solidFill>
           <a:ln/>
         </p:spPr>
-        <p:txBody>
-          <a:bodyPr/>
-          <a:lstStyle/>
-          <a:p>
-            <a:endParaRPr lang="en-US"/>
-          </a:p>
-        </p:txBody>
       </p:sp>
       <p:sp>
         <p:nvSpPr>
@@ -4347,13 +4378,6 @@
           </a:solidFill>
           <a:ln/>
         </p:spPr>
-        <p:txBody>
-          <a:bodyPr/>
-          <a:lstStyle/>
-          <a:p>
-            <a:endParaRPr lang="en-US"/>
-          </a:p>
-        </p:txBody>
       </p:sp>
       <p:sp>
         <p:nvSpPr>
@@ -4374,13 +4398,6 @@
           </a:solidFill>
           <a:ln/>
         </p:spPr>
-        <p:txBody>
-          <a:bodyPr/>
-          <a:lstStyle/>
-          <a:p>
-            <a:endParaRPr lang="en-US"/>
-          </a:p>
-        </p:txBody>
       </p:sp>
       <p:sp>
         <p:nvSpPr>
@@ -4403,11 +4420,11 @@
           <a:bodyPr wrap="square" lIns="0" tIns="0" rIns="0" bIns="0" rtlCol="0" anchor="ctr"/>
           <a:lstStyle/>
           <a:p>
-            <a:pPr marL="0" indent="0" algn="l">
-              <a:buNone/>
-            </a:pPr>
-            <a:r>
-              <a:rPr lang="en-US" sz="1100" b="1" kern="0" spc="100" dirty="0">
+            <a:pPr algn="l" indent="0" marL="0">
+              <a:buNone/>
+            </a:pPr>
+            <a:r>
+              <a:rPr lang="en-US" sz="1100" b="1" spc="100" kern="0" dirty="0">
                 <a:solidFill>
                   <a:srgbClr val="2FD1C0"/>
                 </a:solidFill>
@@ -4417,8 +4434,11 @@
               </a:rPr>
               <a:t>STAGE 09  </a:t>
             </a:r>
-            <a:r>
-              <a:rPr lang="en-US" sz="1100" kern="0" spc="100" dirty="0">
+            <a:pPr algn="l" indent="0" marL="0">
+              <a:buNone/>
+            </a:pPr>
+            <a:r>
+              <a:rPr lang="en-US" sz="1100" spc="100" kern="0" dirty="0">
                 <a:solidFill>
                   <a:srgbClr val="99A2CC"/>
                 </a:solidFill>
@@ -4453,7 +4473,7 @@
           <a:bodyPr wrap="square" lIns="0" tIns="0" rIns="0" bIns="0" rtlCol="0" anchor="ctr"/>
           <a:lstStyle/>
           <a:p>
-            <a:pPr marL="0" indent="0">
+            <a:pPr indent="0" marL="0">
               <a:buNone/>
             </a:pPr>
             <a:r>
@@ -4489,7 +4509,7 @@
           <a:ln/>
         </p:spPr>
         <p:txBody>
-          <a:bodyPr wrap="square" lIns="0" tIns="0" rIns="0" bIns="0" rtlCol="0" anchor="ctr"/>
+          <a:bodyPr wrap="square" lIns="0" tIns="0" rIns="0" bIns="0" rtlCol="0" anchor="t"/>
           <a:lstStyle/>
           <a:p>
             <a:pPr marL="342900" indent="-342900">
@@ -4603,13 +4623,6 @@
             <a:prstDash val="solid"/>
           </a:ln>
         </p:spPr>
-        <p:txBody>
-          <a:bodyPr/>
-          <a:lstStyle/>
-          <a:p>
-            <a:endParaRPr lang="en-US"/>
-          </a:p>
-        </p:txBody>
       </p:sp>
       <p:sp>
         <p:nvSpPr>
@@ -4632,11 +4645,11 @@
           <a:bodyPr wrap="square" lIns="0" tIns="0" rIns="0" bIns="0" rtlCol="0" anchor="ctr"/>
           <a:lstStyle/>
           <a:p>
-            <a:pPr marL="0" indent="0">
-              <a:buNone/>
-            </a:pPr>
-            <a:r>
-              <a:rPr lang="en-US" sz="1050" kern="0" spc="100" dirty="0">
+            <a:pPr indent="0" marL="0">
+              <a:buNone/>
+            </a:pPr>
+            <a:r>
+              <a:rPr lang="en-US" sz="1050" spc="100" kern="0" dirty="0">
                 <a:solidFill>
                   <a:srgbClr val="2FD1C0"/>
                 </a:solidFill>
@@ -4672,13 +4685,6 @@
             <a:prstDash val="solid"/>
           </a:ln>
         </p:spPr>
-        <p:txBody>
-          <a:bodyPr/>
-          <a:lstStyle/>
-          <a:p>
-            <a:endParaRPr lang="en-US"/>
-          </a:p>
-        </p:txBody>
       </p:sp>
       <p:sp>
         <p:nvSpPr>
@@ -4698,10 +4704,10 @@
           <a:ln/>
         </p:spPr>
         <p:txBody>
-          <a:bodyPr wrap="square" lIns="0" tIns="0" rIns="0" bIns="0" rtlCol="0" anchor="ctr"/>
-          <a:lstStyle/>
-          <a:p>
-            <a:pPr marL="0" indent="0">
+          <a:bodyPr wrap="square" lIns="0" tIns="0" rIns="0" bIns="0" rtlCol="0" anchor="t"/>
+          <a:lstStyle/>
+          <a:p>
+            <a:pPr indent="0" marL="0">
               <a:lnSpc>
                 <a:spcPct val="112000"/>
               </a:lnSpc>
@@ -4721,7 +4727,7 @@
             <a:endParaRPr lang="en-US" sz="1000" dirty="0"/>
           </a:p>
           <a:p>
-            <a:pPr marL="0" indent="0">
+            <a:pPr indent="0" marL="0">
               <a:lnSpc>
                 <a:spcPct val="112000"/>
               </a:lnSpc>
@@ -4741,7 +4747,7 @@
             <a:endParaRPr lang="en-US" sz="1000" dirty="0"/>
           </a:p>
           <a:p>
-            <a:pPr marL="0" indent="0">
+            <a:pPr indent="0" marL="0">
               <a:lnSpc>
                 <a:spcPct val="112000"/>
               </a:lnSpc>
@@ -4761,7 +4767,7 @@
             <a:endParaRPr lang="en-US" sz="1000" dirty="0"/>
           </a:p>
           <a:p>
-            <a:pPr marL="0" indent="0">
+            <a:pPr indent="0" marL="0">
               <a:lnSpc>
                 <a:spcPct val="112000"/>
               </a:lnSpc>
@@ -4781,7 +4787,7 @@
             <a:endParaRPr lang="en-US" sz="1000" dirty="0"/>
           </a:p>
           <a:p>
-            <a:pPr marL="0" indent="0">
+            <a:pPr indent="0" marL="0">
               <a:lnSpc>
                 <a:spcPct val="112000"/>
               </a:lnSpc>
@@ -4801,7 +4807,7 @@
             <a:endParaRPr lang="en-US" sz="1000" dirty="0"/>
           </a:p>
           <a:p>
-            <a:pPr marL="0" indent="0">
+            <a:pPr indent="0" marL="0">
               <a:lnSpc>
                 <a:spcPct val="112000"/>
               </a:lnSpc>
@@ -4821,7 +4827,7 @@
             <a:endParaRPr lang="en-US" sz="1000" dirty="0"/>
           </a:p>
           <a:p>
-            <a:pPr marL="0" indent="0">
+            <a:pPr indent="0" marL="0">
               <a:lnSpc>
                 <a:spcPct val="112000"/>
               </a:lnSpc>
@@ -4841,7 +4847,7 @@
             <a:endParaRPr lang="en-US" sz="1000" dirty="0"/>
           </a:p>
           <a:p>
-            <a:pPr marL="0" indent="0">
+            <a:pPr indent="0" marL="0">
               <a:lnSpc>
                 <a:spcPct val="112000"/>
               </a:lnSpc>
@@ -4861,7 +4867,7 @@
             <a:endParaRPr lang="en-US" sz="1000" dirty="0"/>
           </a:p>
           <a:p>
-            <a:pPr marL="0" indent="0">
+            <a:pPr indent="0" marL="0">
               <a:lnSpc>
                 <a:spcPct val="112000"/>
               </a:lnSpc>
@@ -4870,7 +4876,7 @@
             <a:endParaRPr lang="en-US" sz="1000" dirty="0"/>
           </a:p>
           <a:p>
-            <a:pPr marL="0" indent="0">
+            <a:pPr indent="0" marL="0">
               <a:lnSpc>
                 <a:spcPct val="112000"/>
               </a:lnSpc>
@@ -4912,7 +4918,7 @@
           <a:bodyPr wrap="square" lIns="0" tIns="0" rIns="0" bIns="0" rtlCol="0" anchor="ctr"/>
           <a:lstStyle/>
           <a:p>
-            <a:pPr marL="0" indent="0" algn="l">
+            <a:pPr algn="l" indent="0" marL="0">
               <a:buNone/>
             </a:pPr>
             <a:r>
@@ -4951,7 +4957,7 @@
           <a:bodyPr wrap="square" lIns="0" tIns="0" rIns="0" bIns="0" rtlCol="0" anchor="ctr"/>
           <a:lstStyle/>
           <a:p>
-            <a:pPr marL="0" indent="0" algn="r">
+            <a:pPr algn="r" indent="0" marL="0">
               <a:buNone/>
             </a:pPr>
             <a:r>
@@ -4985,7 +4991,6 @@
         <a:solidFill>
           <a:srgbClr val="0E1330"/>
         </a:solidFill>
-        <a:effectLst/>
       </p:bgPr>
     </p:bg>
     <p:spTree>
@@ -5021,13 +5026,6 @@
           </a:solidFill>
           <a:ln/>
         </p:spPr>
-        <p:txBody>
-          <a:bodyPr/>
-          <a:lstStyle/>
-          <a:p>
-            <a:endParaRPr lang="en-US"/>
-          </a:p>
-        </p:txBody>
       </p:sp>
       <p:sp>
         <p:nvSpPr>
@@ -5048,13 +5046,6 @@
           </a:solidFill>
           <a:ln/>
         </p:spPr>
-        <p:txBody>
-          <a:bodyPr/>
-          <a:lstStyle/>
-          <a:p>
-            <a:endParaRPr lang="en-US"/>
-          </a:p>
-        </p:txBody>
       </p:sp>
       <p:sp>
         <p:nvSpPr>
@@ -5075,13 +5066,6 @@
           </a:solidFill>
           <a:ln/>
         </p:spPr>
-        <p:txBody>
-          <a:bodyPr/>
-          <a:lstStyle/>
-          <a:p>
-            <a:endParaRPr lang="en-US"/>
-          </a:p>
-        </p:txBody>
       </p:sp>
       <p:sp>
         <p:nvSpPr>
@@ -5102,13 +5086,6 @@
           </a:solidFill>
           <a:ln/>
         </p:spPr>
-        <p:txBody>
-          <a:bodyPr/>
-          <a:lstStyle/>
-          <a:p>
-            <a:endParaRPr lang="en-US"/>
-          </a:p>
-        </p:txBody>
       </p:sp>
       <p:sp>
         <p:nvSpPr>
@@ -5129,13 +5106,6 @@
           </a:solidFill>
           <a:ln/>
         </p:spPr>
-        <p:txBody>
-          <a:bodyPr/>
-          <a:lstStyle/>
-          <a:p>
-            <a:endParaRPr lang="en-US"/>
-          </a:p>
-        </p:txBody>
       </p:sp>
       <p:sp>
         <p:nvSpPr>
@@ -5156,13 +5126,6 @@
           </a:solidFill>
           <a:ln/>
         </p:spPr>
-        <p:txBody>
-          <a:bodyPr/>
-          <a:lstStyle/>
-          <a:p>
-            <a:endParaRPr lang="en-US"/>
-          </a:p>
-        </p:txBody>
       </p:sp>
       <p:sp>
         <p:nvSpPr>
@@ -5183,13 +5146,6 @@
           </a:solidFill>
           <a:ln/>
         </p:spPr>
-        <p:txBody>
-          <a:bodyPr/>
-          <a:lstStyle/>
-          <a:p>
-            <a:endParaRPr lang="en-US"/>
-          </a:p>
-        </p:txBody>
       </p:sp>
       <p:sp>
         <p:nvSpPr>
@@ -5210,13 +5166,6 @@
           </a:solidFill>
           <a:ln/>
         </p:spPr>
-        <p:txBody>
-          <a:bodyPr/>
-          <a:lstStyle/>
-          <a:p>
-            <a:endParaRPr lang="en-US"/>
-          </a:p>
-        </p:txBody>
       </p:sp>
       <p:sp>
         <p:nvSpPr>
@@ -5237,13 +5186,6 @@
           </a:solidFill>
           <a:ln/>
         </p:spPr>
-        <p:txBody>
-          <a:bodyPr/>
-          <a:lstStyle/>
-          <a:p>
-            <a:endParaRPr lang="en-US"/>
-          </a:p>
-        </p:txBody>
       </p:sp>
       <p:sp>
         <p:nvSpPr>
@@ -5264,13 +5206,6 @@
           </a:solidFill>
           <a:ln/>
         </p:spPr>
-        <p:txBody>
-          <a:bodyPr/>
-          <a:lstStyle/>
-          <a:p>
-            <a:endParaRPr lang="en-US"/>
-          </a:p>
-        </p:txBody>
       </p:sp>
       <p:sp>
         <p:nvSpPr>
@@ -5293,11 +5228,11 @@
           <a:bodyPr wrap="square" lIns="0" tIns="0" rIns="0" bIns="0" rtlCol="0" anchor="ctr"/>
           <a:lstStyle/>
           <a:p>
-            <a:pPr marL="0" indent="0" algn="l">
-              <a:buNone/>
-            </a:pPr>
-            <a:r>
-              <a:rPr lang="en-US" sz="1100" b="1" kern="0" spc="100" dirty="0">
+            <a:pPr algn="l" indent="0" marL="0">
+              <a:buNone/>
+            </a:pPr>
+            <a:r>
+              <a:rPr lang="en-US" sz="1100" b="1" spc="100" kern="0" dirty="0">
                 <a:solidFill>
                   <a:srgbClr val="2FD1C0"/>
                 </a:solidFill>
@@ -5307,8 +5242,11 @@
               </a:rPr>
               <a:t>STAGE 10  </a:t>
             </a:r>
-            <a:r>
-              <a:rPr lang="en-US" sz="1100" kern="0" spc="100" dirty="0">
+            <a:pPr algn="l" indent="0" marL="0">
+              <a:buNone/>
+            </a:pPr>
+            <a:r>
+              <a:rPr lang="en-US" sz="1100" spc="100" kern="0" dirty="0">
                 <a:solidFill>
                   <a:srgbClr val="99A2CC"/>
                 </a:solidFill>
@@ -5343,7 +5281,7 @@
           <a:bodyPr wrap="square" lIns="0" tIns="0" rIns="0" bIns="0" rtlCol="0" anchor="ctr"/>
           <a:lstStyle/>
           <a:p>
-            <a:pPr marL="0" indent="0">
+            <a:pPr indent="0" marL="0">
               <a:buNone/>
             </a:pPr>
             <a:r>
@@ -5379,7 +5317,7 @@
           <a:ln/>
         </p:spPr>
         <p:txBody>
-          <a:bodyPr wrap="square" lIns="0" tIns="0" rIns="0" bIns="0" rtlCol="0" anchor="ctr"/>
+          <a:bodyPr wrap="square" lIns="0" tIns="0" rIns="0" bIns="0" rtlCol="0" anchor="t"/>
           <a:lstStyle/>
           <a:p>
             <a:pPr marL="342900" indent="-342900">
@@ -5514,13 +5452,6 @@
             <a:prstDash val="solid"/>
           </a:ln>
         </p:spPr>
-        <p:txBody>
-          <a:bodyPr/>
-          <a:lstStyle/>
-          <a:p>
-            <a:endParaRPr lang="en-US"/>
-          </a:p>
-        </p:txBody>
       </p:sp>
       <p:sp>
         <p:nvSpPr>
@@ -5543,11 +5474,11 @@
           <a:bodyPr wrap="square" lIns="0" tIns="0" rIns="0" bIns="0" rtlCol="0" anchor="ctr"/>
           <a:lstStyle/>
           <a:p>
-            <a:pPr marL="0" indent="0">
-              <a:buNone/>
-            </a:pPr>
-            <a:r>
-              <a:rPr lang="en-US" sz="1050" kern="0" spc="100" dirty="0">
+            <a:pPr indent="0" marL="0">
+              <a:buNone/>
+            </a:pPr>
+            <a:r>
+              <a:rPr lang="en-US" sz="1050" spc="100" kern="0" dirty="0">
                 <a:solidFill>
                   <a:srgbClr val="2FD1C0"/>
                 </a:solidFill>
@@ -5583,13 +5514,6 @@
             <a:prstDash val="solid"/>
           </a:ln>
         </p:spPr>
-        <p:txBody>
-          <a:bodyPr/>
-          <a:lstStyle/>
-          <a:p>
-            <a:endParaRPr lang="en-US"/>
-          </a:p>
-        </p:txBody>
       </p:sp>
       <p:sp>
         <p:nvSpPr>
@@ -5609,10 +5533,10 @@
           <a:ln/>
         </p:spPr>
         <p:txBody>
-          <a:bodyPr wrap="square" lIns="0" tIns="0" rIns="0" bIns="0" rtlCol="0" anchor="ctr"/>
-          <a:lstStyle/>
-          <a:p>
-            <a:pPr marL="0" indent="0">
+          <a:bodyPr wrap="square" lIns="0" tIns="0" rIns="0" bIns="0" rtlCol="0" anchor="t"/>
+          <a:lstStyle/>
+          <a:p>
+            <a:pPr indent="0" marL="0">
               <a:lnSpc>
                 <a:spcPct val="112000"/>
               </a:lnSpc>
@@ -5632,7 +5556,7 @@
             <a:endParaRPr lang="en-US" sz="1000" dirty="0"/>
           </a:p>
           <a:p>
-            <a:pPr marL="0" indent="0">
+            <a:pPr indent="0" marL="0">
               <a:lnSpc>
                 <a:spcPct val="112000"/>
               </a:lnSpc>
@@ -5652,7 +5576,7 @@
             <a:endParaRPr lang="en-US" sz="1000" dirty="0"/>
           </a:p>
           <a:p>
-            <a:pPr marL="0" indent="0">
+            <a:pPr indent="0" marL="0">
               <a:lnSpc>
                 <a:spcPct val="112000"/>
               </a:lnSpc>
@@ -5661,7 +5585,7 @@
             <a:endParaRPr lang="en-US" sz="1000" dirty="0"/>
           </a:p>
           <a:p>
-            <a:pPr marL="0" indent="0">
+            <a:pPr indent="0" marL="0">
               <a:lnSpc>
                 <a:spcPct val="112000"/>
               </a:lnSpc>
@@ -5681,7 +5605,7 @@
             <a:endParaRPr lang="en-US" sz="1000" dirty="0"/>
           </a:p>
           <a:p>
-            <a:pPr marL="0" indent="0">
+            <a:pPr indent="0" marL="0">
               <a:lnSpc>
                 <a:spcPct val="112000"/>
               </a:lnSpc>
@@ -5701,7 +5625,7 @@
             <a:endParaRPr lang="en-US" sz="1000" dirty="0"/>
           </a:p>
           <a:p>
-            <a:pPr marL="0" indent="0">
+            <a:pPr indent="0" marL="0">
               <a:lnSpc>
                 <a:spcPct val="112000"/>
               </a:lnSpc>
@@ -5721,7 +5645,7 @@
             <a:endParaRPr lang="en-US" sz="1000" dirty="0"/>
           </a:p>
           <a:p>
-            <a:pPr marL="0" indent="0">
+            <a:pPr indent="0" marL="0">
               <a:lnSpc>
                 <a:spcPct val="112000"/>
               </a:lnSpc>
@@ -5730,7 +5654,7 @@
             <a:endParaRPr lang="en-US" sz="1000" dirty="0"/>
           </a:p>
           <a:p>
-            <a:pPr marL="0" indent="0">
+            <a:pPr indent="0" marL="0">
               <a:lnSpc>
                 <a:spcPct val="112000"/>
               </a:lnSpc>
@@ -5772,7 +5696,7 @@
           <a:bodyPr wrap="square" lIns="0" tIns="0" rIns="0" bIns="0" rtlCol="0" anchor="ctr"/>
           <a:lstStyle/>
           <a:p>
-            <a:pPr marL="0" indent="0" algn="l">
+            <a:pPr algn="l" indent="0" marL="0">
               <a:buNone/>
             </a:pPr>
             <a:r>
@@ -5811,7 +5735,7 @@
           <a:bodyPr wrap="square" lIns="0" tIns="0" rIns="0" bIns="0" rtlCol="0" anchor="ctr"/>
           <a:lstStyle/>
           <a:p>
-            <a:pPr marL="0" indent="0" algn="r">
+            <a:pPr algn="r" indent="0" marL="0">
               <a:buNone/>
             </a:pPr>
             <a:r>
@@ -5845,7 +5769,6 @@
         <a:solidFill>
           <a:srgbClr val="0A0E24"/>
         </a:solidFill>
-        <a:effectLst/>
       </p:bgPr>
     </p:bg>
     <p:spTree>
@@ -5864,20 +5787,20 @@
       </p:grpSpPr>
       <p:pic>
         <p:nvPicPr>
-          <p:cNvPr id="2" name="Image 0" descr="healthcare-fhir.png"/>
+          <p:cNvPr id="2" name="Image 0" descr="healthcare-fhir.png">    </p:cNvPr>
           <p:cNvPicPr>
             <a:picLocks noChangeAspect="1"/>
           </p:cNvPicPr>
           <p:nvPr/>
         </p:nvPicPr>
         <p:blipFill>
-          <a:blip r:embed="rId3"/>
-          <a:srcRect/>
+          <a:blip r:embed="rId1"/>
+          <a:srcRect l="0" r="0" t="0" b="0"/>
           <a:stretch/>
         </p:blipFill>
         <p:spPr>
           <a:xfrm>
-            <a:off x="320040" y="-218440"/>
+            <a:off x="304945" y="0"/>
             <a:ext cx="11581805" cy="6858000"/>
           </a:xfrm>
           <a:prstGeom prst="rect">
@@ -5913,13 +5836,6 @@
             <a:prstDash val="solid"/>
           </a:ln>
         </p:spPr>
-        <p:txBody>
-          <a:bodyPr/>
-          <a:lstStyle/>
-          <a:p>
-            <a:endParaRPr lang="en-US"/>
-          </a:p>
-        </p:txBody>
       </p:sp>
       <p:sp>
         <p:nvSpPr>
@@ -5942,11 +5858,11 @@
           <a:bodyPr wrap="square" lIns="0" tIns="0" rIns="0" bIns="0" rtlCol="0" anchor="ctr"/>
           <a:lstStyle/>
           <a:p>
-            <a:pPr marL="0" indent="0">
-              <a:buNone/>
-            </a:pPr>
-            <a:r>
-              <a:rPr lang="en-US" sz="1250" b="1" kern="0" spc="100" dirty="0">
+            <a:pPr indent="0" marL="0">
+              <a:buNone/>
+            </a:pPr>
+            <a:r>
+              <a:rPr lang="en-US" sz="1250" b="1" spc="100" kern="0" dirty="0">
                 <a:solidFill>
                   <a:srgbClr val="2FD1C0"/>
                 </a:solidFill>
@@ -5956,8 +5872,11 @@
               </a:rPr>
               <a:t>WORKED EXAMPLE   </a:t>
             </a:r>
-            <a:r>
-              <a:rPr lang="en-US" sz="1250" kern="0" spc="100" dirty="0">
+            <a:pPr indent="0" marL="0">
+              <a:buNone/>
+            </a:pPr>
+            <a:r>
+              <a:rPr lang="en-US" sz="1250" spc="100" kern="0" dirty="0">
                 <a:solidFill>
                   <a:srgbClr val="F5F7FF"/>
                 </a:solidFill>
@@ -5992,13 +5911,6 @@
           </a:solidFill>
           <a:ln/>
         </p:spPr>
-        <p:txBody>
-          <a:bodyPr/>
-          <a:lstStyle/>
-          <a:p>
-            <a:endParaRPr lang="en-US"/>
-          </a:p>
-        </p:txBody>
       </p:sp>
       <p:sp>
         <p:nvSpPr>
@@ -6019,13 +5931,6 @@
           </a:solidFill>
           <a:ln/>
         </p:spPr>
-        <p:txBody>
-          <a:bodyPr/>
-          <a:lstStyle/>
-          <a:p>
-            <a:endParaRPr lang="en-US"/>
-          </a:p>
-        </p:txBody>
       </p:sp>
       <p:sp>
         <p:nvSpPr>
@@ -6048,7 +5953,7 @@
           <a:bodyPr wrap="square" lIns="0" tIns="0" rIns="0" bIns="0" rtlCol="0" anchor="ctr"/>
           <a:lstStyle/>
           <a:p>
-            <a:pPr marL="0" indent="0">
+            <a:pPr indent="0" marL="0">
               <a:buNone/>
             </a:pPr>
             <a:r>
@@ -6062,6 +5967,9 @@
               </a:rPr>
               <a:t>$287</a:t>
             </a:r>
+            <a:pPr indent="0" marL="0">
+              <a:buNone/>
+            </a:pPr>
             <a:r>
               <a:rPr lang="en-US" sz="1200" dirty="0">
                 <a:solidFill>
@@ -6098,7 +6006,7 @@
           <a:bodyPr wrap="square" lIns="0" tIns="0" rIns="0" bIns="0" rtlCol="0" anchor="ctr"/>
           <a:lstStyle/>
           <a:p>
-            <a:pPr marL="0" indent="0">
+            <a:pPr indent="0" marL="0">
               <a:buNone/>
             </a:pPr>
             <a:r>
@@ -6112,6 +6020,9 @@
               </a:rPr>
               <a:t>East US 2</a:t>
             </a:r>
+            <a:pPr indent="0" marL="0">
+              <a:buNone/>
+            </a:pPr>
             <a:r>
               <a:rPr lang="en-US" sz="1200" dirty="0">
                 <a:solidFill>
@@ -6123,6 +6034,9 @@
               </a:rPr>
               <a:t>     12 services  ·  5 groups  ·  14 edges (9 sync / 5 async)</a:t>
             </a:r>
+            <a:pPr indent="0" marL="0">
+              <a:buNone/>
+            </a:pPr>
             <a:r>
               <a:rPr lang="en-US" sz="1200" dirty="0">
                 <a:solidFill>
@@ -6159,7 +6073,7 @@
           <a:bodyPr wrap="square" lIns="0" tIns="0" rIns="0" bIns="0" rtlCol="0" anchor="ctr"/>
           <a:lstStyle/>
           <a:p>
-            <a:pPr marL="0" indent="0" algn="r">
+            <a:pPr algn="r" indent="0" marL="0">
               <a:buNone/>
             </a:pPr>
             <a:r>
@@ -6198,7 +6112,7 @@
           <a:bodyPr wrap="square" lIns="0" tIns="0" rIns="0" bIns="0" rtlCol="0" anchor="ctr"/>
           <a:lstStyle/>
           <a:p>
-            <a:pPr marL="0" indent="0">
+            <a:pPr indent="0" marL="0">
               <a:buNone/>
             </a:pPr>
             <a:r>
@@ -6232,7 +6146,6 @@
         <a:solidFill>
           <a:srgbClr val="0E1330"/>
         </a:solidFill>
-        <a:effectLst/>
       </p:bgPr>
     </p:bg>
     <p:spTree>
@@ -6270,7 +6183,7 @@
           <a:bodyPr wrap="square" lIns="0" tIns="0" rIns="0" bIns="0" rtlCol="0" anchor="ctr"/>
           <a:lstStyle/>
           <a:p>
-            <a:pPr marL="0" indent="0" algn="l">
+            <a:pPr algn="l" indent="0" marL="0">
               <a:buNone/>
             </a:pPr>
             <a:r>
@@ -6312,13 +6225,6 @@
             <a:prstDash val="solid"/>
           </a:ln>
         </p:spPr>
-        <p:txBody>
-          <a:bodyPr/>
-          <a:lstStyle/>
-          <a:p>
-            <a:endParaRPr lang="en-US"/>
-          </a:p>
-        </p:txBody>
       </p:sp>
       <p:sp>
         <p:nvSpPr>
@@ -6341,7 +6247,7 @@
           <a:bodyPr wrap="square" lIns="0" tIns="0" rIns="0" bIns="0" rtlCol="0" anchor="ctr"/>
           <a:lstStyle/>
           <a:p>
-            <a:pPr marL="0" indent="0">
+            <a:pPr indent="0" marL="0">
               <a:buNone/>
             </a:pPr>
             <a:r>
@@ -6380,7 +6286,7 @@
           <a:bodyPr wrap="square" lIns="0" tIns="0" rIns="0" bIns="0" rtlCol="0" anchor="ctr"/>
           <a:lstStyle/>
           <a:p>
-            <a:pPr marL="0" indent="0">
+            <a:pPr indent="0" marL="0">
               <a:buNone/>
             </a:pPr>
             <a:r>
@@ -6419,7 +6325,7 @@
           <a:bodyPr wrap="square" lIns="0" tIns="0" rIns="0" bIns="0" rtlCol="0" anchor="ctr"/>
           <a:lstStyle/>
           <a:p>
-            <a:pPr marL="0" indent="0">
+            <a:pPr indent="0" marL="0">
               <a:buNone/>
             </a:pPr>
             <a:r>
@@ -6461,13 +6367,6 @@
             <a:prstDash val="solid"/>
           </a:ln>
         </p:spPr>
-        <p:txBody>
-          <a:bodyPr/>
-          <a:lstStyle/>
-          <a:p>
-            <a:endParaRPr lang="en-US"/>
-          </a:p>
-        </p:txBody>
       </p:sp>
       <p:sp>
         <p:nvSpPr>
@@ -6490,7 +6389,7 @@
           <a:bodyPr wrap="square" lIns="0" tIns="0" rIns="0" bIns="0" rtlCol="0" anchor="ctr"/>
           <a:lstStyle/>
           <a:p>
-            <a:pPr marL="0" indent="0">
+            <a:pPr indent="0" marL="0">
               <a:buNone/>
             </a:pPr>
             <a:r>
@@ -6529,7 +6428,7 @@
           <a:bodyPr wrap="square" lIns="0" tIns="0" rIns="0" bIns="0" rtlCol="0" anchor="ctr"/>
           <a:lstStyle/>
           <a:p>
-            <a:pPr marL="0" indent="0">
+            <a:pPr indent="0" marL="0">
               <a:buNone/>
             </a:pPr>
             <a:r>
@@ -6568,7 +6467,7 @@
           <a:bodyPr wrap="square" lIns="0" tIns="0" rIns="0" bIns="0" rtlCol="0" anchor="ctr"/>
           <a:lstStyle/>
           <a:p>
-            <a:pPr marL="0" indent="0">
+            <a:pPr indent="0" marL="0">
               <a:buNone/>
             </a:pPr>
             <a:r>
@@ -6610,13 +6509,6 @@
             <a:prstDash val="solid"/>
           </a:ln>
         </p:spPr>
-        <p:txBody>
-          <a:bodyPr/>
-          <a:lstStyle/>
-          <a:p>
-            <a:endParaRPr lang="en-US"/>
-          </a:p>
-        </p:txBody>
       </p:sp>
       <p:sp>
         <p:nvSpPr>
@@ -6639,7 +6531,7 @@
           <a:bodyPr wrap="square" lIns="0" tIns="0" rIns="0" bIns="0" rtlCol="0" anchor="ctr"/>
           <a:lstStyle/>
           <a:p>
-            <a:pPr marL="0" indent="0">
+            <a:pPr indent="0" marL="0">
               <a:buNone/>
             </a:pPr>
             <a:r>
@@ -6678,7 +6570,7 @@
           <a:bodyPr wrap="square" lIns="0" tIns="0" rIns="0" bIns="0" rtlCol="0" anchor="ctr"/>
           <a:lstStyle/>
           <a:p>
-            <a:pPr marL="0" indent="0">
+            <a:pPr indent="0" marL="0">
               <a:buNone/>
             </a:pPr>
             <a:r>
@@ -6717,7 +6609,7 @@
           <a:bodyPr wrap="square" lIns="0" tIns="0" rIns="0" bIns="0" rtlCol="0" anchor="ctr"/>
           <a:lstStyle/>
           <a:p>
-            <a:pPr marL="0" indent="0">
+            <a:pPr indent="0" marL="0">
               <a:buNone/>
             </a:pPr>
             <a:r>
@@ -6759,13 +6651,6 @@
             <a:prstDash val="solid"/>
           </a:ln>
         </p:spPr>
-        <p:txBody>
-          <a:bodyPr/>
-          <a:lstStyle/>
-          <a:p>
-            <a:endParaRPr lang="en-US"/>
-          </a:p>
-        </p:txBody>
       </p:sp>
       <p:sp>
         <p:nvSpPr>
@@ -6788,7 +6673,7 @@
           <a:bodyPr wrap="square" lIns="0" tIns="0" rIns="0" bIns="0" rtlCol="0" anchor="ctr"/>
           <a:lstStyle/>
           <a:p>
-            <a:pPr marL="0" indent="0">
+            <a:pPr indent="0" marL="0">
               <a:buNone/>
             </a:pPr>
             <a:r>
@@ -6827,7 +6712,7 @@
           <a:bodyPr wrap="square" lIns="0" tIns="0" rIns="0" bIns="0" rtlCol="0" anchor="ctr"/>
           <a:lstStyle/>
           <a:p>
-            <a:pPr marL="0" indent="0">
+            <a:pPr indent="0" marL="0">
               <a:buNone/>
             </a:pPr>
             <a:r>
@@ -6866,7 +6751,7 @@
           <a:bodyPr wrap="square" lIns="0" tIns="0" rIns="0" bIns="0" rtlCol="0" anchor="ctr"/>
           <a:lstStyle/>
           <a:p>
-            <a:pPr marL="0" indent="0">
+            <a:pPr indent="0" marL="0">
               <a:buNone/>
             </a:pPr>
             <a:r>
@@ -6908,13 +6793,6 @@
             <a:prstDash val="solid"/>
           </a:ln>
         </p:spPr>
-        <p:txBody>
-          <a:bodyPr/>
-          <a:lstStyle/>
-          <a:p>
-            <a:endParaRPr lang="en-US"/>
-          </a:p>
-        </p:txBody>
       </p:sp>
       <p:sp>
         <p:nvSpPr>
@@ -6937,7 +6815,7 @@
           <a:bodyPr wrap="square" lIns="0" tIns="0" rIns="0" bIns="0" rtlCol="0" anchor="ctr"/>
           <a:lstStyle/>
           <a:p>
-            <a:pPr marL="0" indent="0">
+            <a:pPr indent="0" marL="0">
               <a:buNone/>
             </a:pPr>
             <a:r>
@@ -6976,7 +6854,7 @@
           <a:bodyPr wrap="square" lIns="0" tIns="0" rIns="0" bIns="0" rtlCol="0" anchor="ctr"/>
           <a:lstStyle/>
           <a:p>
-            <a:pPr marL="0" indent="0">
+            <a:pPr indent="0" marL="0">
               <a:buNone/>
             </a:pPr>
             <a:r>
@@ -7015,7 +6893,7 @@
           <a:bodyPr wrap="square" lIns="0" tIns="0" rIns="0" bIns="0" rtlCol="0" anchor="ctr"/>
           <a:lstStyle/>
           <a:p>
-            <a:pPr marL="0" indent="0">
+            <a:pPr indent="0" marL="0">
               <a:buNone/>
             </a:pPr>
             <a:r>
@@ -7057,13 +6935,6 @@
             <a:prstDash val="solid"/>
           </a:ln>
         </p:spPr>
-        <p:txBody>
-          <a:bodyPr/>
-          <a:lstStyle/>
-          <a:p>
-            <a:endParaRPr lang="en-US"/>
-          </a:p>
-        </p:txBody>
       </p:sp>
       <p:sp>
         <p:nvSpPr>
@@ -7086,7 +6957,7 @@
           <a:bodyPr wrap="square" lIns="0" tIns="0" rIns="0" bIns="0" rtlCol="0" anchor="ctr"/>
           <a:lstStyle/>
           <a:p>
-            <a:pPr marL="0" indent="0">
+            <a:pPr indent="0" marL="0">
               <a:buNone/>
             </a:pPr>
             <a:r>
@@ -7125,7 +6996,7 @@
           <a:bodyPr wrap="square" lIns="0" tIns="0" rIns="0" bIns="0" rtlCol="0" anchor="ctr"/>
           <a:lstStyle/>
           <a:p>
-            <a:pPr marL="0" indent="0">
+            <a:pPr indent="0" marL="0">
               <a:buNone/>
             </a:pPr>
             <a:r>
@@ -7164,7 +7035,7 @@
           <a:bodyPr wrap="square" lIns="0" tIns="0" rIns="0" bIns="0" rtlCol="0" anchor="ctr"/>
           <a:lstStyle/>
           <a:p>
-            <a:pPr marL="0" indent="0">
+            <a:pPr indent="0" marL="0">
               <a:buNone/>
             </a:pPr>
             <a:r>
@@ -7206,13 +7077,6 @@
             <a:prstDash val="solid"/>
           </a:ln>
         </p:spPr>
-        <p:txBody>
-          <a:bodyPr/>
-          <a:lstStyle/>
-          <a:p>
-            <a:endParaRPr lang="en-US"/>
-          </a:p>
-        </p:txBody>
       </p:sp>
       <p:sp>
         <p:nvSpPr>
@@ -7235,7 +7099,7 @@
           <a:bodyPr wrap="square" lIns="0" tIns="0" rIns="0" bIns="0" rtlCol="0" anchor="ctr"/>
           <a:lstStyle/>
           <a:p>
-            <a:pPr marL="0" indent="0">
+            <a:pPr indent="0" marL="0">
               <a:buNone/>
             </a:pPr>
             <a:r>
@@ -7274,7 +7138,7 @@
           <a:bodyPr wrap="square" lIns="0" tIns="0" rIns="0" bIns="0" rtlCol="0" anchor="ctr"/>
           <a:lstStyle/>
           <a:p>
-            <a:pPr marL="0" indent="0">
+            <a:pPr indent="0" marL="0">
               <a:buNone/>
             </a:pPr>
             <a:r>
@@ -7313,7 +7177,7 @@
           <a:bodyPr wrap="square" lIns="0" tIns="0" rIns="0" bIns="0" rtlCol="0" anchor="ctr"/>
           <a:lstStyle/>
           <a:p>
-            <a:pPr marL="0" indent="0">
+            <a:pPr indent="0" marL="0">
               <a:buNone/>
             </a:pPr>
             <a:r>
@@ -7355,13 +7219,6 @@
             <a:prstDash val="solid"/>
           </a:ln>
         </p:spPr>
-        <p:txBody>
-          <a:bodyPr/>
-          <a:lstStyle/>
-          <a:p>
-            <a:endParaRPr lang="en-US"/>
-          </a:p>
-        </p:txBody>
       </p:sp>
       <p:sp>
         <p:nvSpPr>
@@ -7384,7 +7241,7 @@
           <a:bodyPr wrap="square" lIns="0" tIns="0" rIns="0" bIns="0" rtlCol="0" anchor="ctr"/>
           <a:lstStyle/>
           <a:p>
-            <a:pPr marL="0" indent="0">
+            <a:pPr indent="0" marL="0">
               <a:buNone/>
             </a:pPr>
             <a:r>
@@ -7423,7 +7280,7 @@
           <a:bodyPr wrap="square" lIns="0" tIns="0" rIns="0" bIns="0" rtlCol="0" anchor="ctr"/>
           <a:lstStyle/>
           <a:p>
-            <a:pPr marL="0" indent="0">
+            <a:pPr indent="0" marL="0">
               <a:buNone/>
             </a:pPr>
             <a:r>
@@ -7462,7 +7319,7 @@
           <a:bodyPr wrap="square" lIns="0" tIns="0" rIns="0" bIns="0" rtlCol="0" anchor="ctr"/>
           <a:lstStyle/>
           <a:p>
-            <a:pPr marL="0" indent="0">
+            <a:pPr indent="0" marL="0">
               <a:buNone/>
             </a:pPr>
             <a:r>
@@ -7504,13 +7361,6 @@
             <a:prstDash val="solid"/>
           </a:ln>
         </p:spPr>
-        <p:txBody>
-          <a:bodyPr/>
-          <a:lstStyle/>
-          <a:p>
-            <a:endParaRPr lang="en-US"/>
-          </a:p>
-        </p:txBody>
       </p:sp>
       <p:sp>
         <p:nvSpPr>
@@ -7533,7 +7383,7 @@
           <a:bodyPr wrap="square" lIns="0" tIns="0" rIns="0" bIns="0" rtlCol="0" anchor="ctr"/>
           <a:lstStyle/>
           <a:p>
-            <a:pPr marL="0" indent="0">
+            <a:pPr indent="0" marL="0">
               <a:buNone/>
             </a:pPr>
             <a:r>
@@ -7572,7 +7422,7 @@
           <a:bodyPr wrap="square" lIns="0" tIns="0" rIns="0" bIns="0" rtlCol="0" anchor="ctr"/>
           <a:lstStyle/>
           <a:p>
-            <a:pPr marL="0" indent="0">
+            <a:pPr indent="0" marL="0">
               <a:buNone/>
             </a:pPr>
             <a:r>
@@ -7611,7 +7461,7 @@
           <a:bodyPr wrap="square" lIns="0" tIns="0" rIns="0" bIns="0" rtlCol="0" anchor="ctr"/>
           <a:lstStyle/>
           <a:p>
-            <a:pPr marL="0" indent="0">
+            <a:pPr indent="0" marL="0">
               <a:buNone/>
             </a:pPr>
             <a:r>
@@ -7653,13 +7503,6 @@
             <a:prstDash val="solid"/>
           </a:ln>
         </p:spPr>
-        <p:txBody>
-          <a:bodyPr/>
-          <a:lstStyle/>
-          <a:p>
-            <a:endParaRPr lang="en-US"/>
-          </a:p>
-        </p:txBody>
       </p:sp>
       <p:sp>
         <p:nvSpPr>
@@ -7682,7 +7525,7 @@
           <a:bodyPr wrap="square" lIns="0" tIns="0" rIns="0" bIns="0" rtlCol="0" anchor="ctr"/>
           <a:lstStyle/>
           <a:p>
-            <a:pPr marL="0" indent="0">
+            <a:pPr indent="0" marL="0">
               <a:buNone/>
             </a:pPr>
             <a:r>
@@ -7721,7 +7564,7 @@
           <a:bodyPr wrap="square" lIns="0" tIns="0" rIns="0" bIns="0" rtlCol="0" anchor="ctr"/>
           <a:lstStyle/>
           <a:p>
-            <a:pPr marL="0" indent="0">
+            <a:pPr indent="0" marL="0">
               <a:buNone/>
             </a:pPr>
             <a:r>
@@ -7760,7 +7603,7 @@
           <a:bodyPr wrap="square" lIns="0" tIns="0" rIns="0" bIns="0" rtlCol="0" anchor="ctr"/>
           <a:lstStyle/>
           <a:p>
-            <a:pPr marL="0" indent="0">
+            <a:pPr indent="0" marL="0">
               <a:buNone/>
             </a:pPr>
             <a:r>
@@ -7797,13 +7640,6 @@
           </a:solidFill>
           <a:ln/>
         </p:spPr>
-        <p:txBody>
-          <a:bodyPr/>
-          <a:lstStyle/>
-          <a:p>
-            <a:endParaRPr lang="en-US"/>
-          </a:p>
-        </p:txBody>
       </p:sp>
       <p:sp>
         <p:nvSpPr>
@@ -7824,13 +7660,6 @@
           </a:solidFill>
           <a:ln/>
         </p:spPr>
-        <p:txBody>
-          <a:bodyPr/>
-          <a:lstStyle/>
-          <a:p>
-            <a:endParaRPr lang="en-US"/>
-          </a:p>
-        </p:txBody>
       </p:sp>
       <p:sp>
         <p:nvSpPr>
@@ -7853,7 +7682,7 @@
           <a:bodyPr wrap="square" lIns="0" tIns="0" rIns="0" bIns="0" rtlCol="0" anchor="ctr"/>
           <a:lstStyle/>
           <a:p>
-            <a:pPr marL="0" indent="0" algn="l">
+            <a:pPr algn="l" indent="0" marL="0">
               <a:buNone/>
             </a:pPr>
             <a:r>
@@ -7892,7 +7721,7 @@
           <a:bodyPr wrap="square" lIns="0" tIns="0" rIns="0" bIns="0" rtlCol="0" anchor="ctr"/>
           <a:lstStyle/>
           <a:p>
-            <a:pPr marL="0" indent="0" algn="r">
+            <a:pPr algn="r" indent="0" marL="0">
               <a:buNone/>
             </a:pPr>
             <a:r>
@@ -7926,7 +7755,6 @@
         <a:solidFill>
           <a:srgbClr val="0A0E24"/>
         </a:solidFill>
-        <a:effectLst/>
       </p:bgPr>
     </p:bg>
     <p:spTree>
@@ -7962,13 +7790,6 @@
           </a:solidFill>
           <a:ln/>
         </p:spPr>
-        <p:txBody>
-          <a:bodyPr/>
-          <a:lstStyle/>
-          <a:p>
-            <a:endParaRPr lang="en-US"/>
-          </a:p>
-        </p:txBody>
       </p:sp>
       <p:sp>
         <p:nvSpPr>
@@ -7989,13 +7810,6 @@
           </a:solidFill>
           <a:ln/>
         </p:spPr>
-        <p:txBody>
-          <a:bodyPr/>
-          <a:lstStyle/>
-          <a:p>
-            <a:endParaRPr lang="en-US"/>
-          </a:p>
-        </p:txBody>
       </p:sp>
       <p:sp>
         <p:nvSpPr>
@@ -8018,11 +7832,11 @@
           <a:bodyPr wrap="square" lIns="0" tIns="0" rIns="0" bIns="0" rtlCol="0" anchor="ctr"/>
           <a:lstStyle/>
           <a:p>
-            <a:pPr marL="0" indent="0">
-              <a:buNone/>
-            </a:pPr>
-            <a:r>
-              <a:rPr lang="en-US" sz="1300" kern="0" spc="300" dirty="0">
+            <a:pPr indent="0" marL="0">
+              <a:buNone/>
+            </a:pPr>
+            <a:r>
+              <a:rPr lang="en-US" sz="1300" spc="300" kern="0" dirty="0">
                 <a:solidFill>
                   <a:srgbClr val="2FD1C0"/>
                 </a:solidFill>
@@ -8057,7 +7871,7 @@
           <a:bodyPr wrap="square" lIns="0" tIns="0" rIns="0" bIns="0" rtlCol="0" anchor="ctr"/>
           <a:lstStyle/>
           <a:p>
-            <a:pPr marL="0" indent="0">
+            <a:pPr indent="0" marL="0">
               <a:buNone/>
             </a:pPr>
             <a:r>
@@ -8101,13 +7915,6 @@
             <a:prstDash val="solid"/>
           </a:ln>
         </p:spPr>
-        <p:txBody>
-          <a:bodyPr/>
-          <a:lstStyle/>
-          <a:p>
-            <a:endParaRPr lang="en-US"/>
-          </a:p>
-        </p:txBody>
       </p:sp>
       <p:sp>
         <p:nvSpPr>
@@ -8128,13 +7935,6 @@
           </a:solidFill>
           <a:ln/>
         </p:spPr>
-        <p:txBody>
-          <a:bodyPr/>
-          <a:lstStyle/>
-          <a:p>
-            <a:endParaRPr lang="en-US"/>
-          </a:p>
-        </p:txBody>
       </p:sp>
       <p:sp>
         <p:nvSpPr>
@@ -8157,7 +7957,7 @@
           <a:bodyPr wrap="square" lIns="0" tIns="0" rIns="0" bIns="0" rtlCol="0" anchor="ctr"/>
           <a:lstStyle/>
           <a:p>
-            <a:pPr marL="0" indent="0">
+            <a:pPr indent="0" marL="0">
               <a:buNone/>
             </a:pPr>
             <a:r>
@@ -8196,7 +7996,7 @@
           <a:bodyPr wrap="square" lIns="0" tIns="0" rIns="0" bIns="0" rtlCol="0" anchor="ctr"/>
           <a:lstStyle/>
           <a:p>
-            <a:pPr marL="0" indent="0">
+            <a:pPr indent="0" marL="0">
               <a:buNone/>
             </a:pPr>
             <a:r>
@@ -8240,13 +8040,6 @@
             <a:prstDash val="solid"/>
           </a:ln>
         </p:spPr>
-        <p:txBody>
-          <a:bodyPr/>
-          <a:lstStyle/>
-          <a:p>
-            <a:endParaRPr lang="en-US"/>
-          </a:p>
-        </p:txBody>
       </p:sp>
       <p:sp>
         <p:nvSpPr>
@@ -8267,13 +8060,6 @@
           </a:solidFill>
           <a:ln/>
         </p:spPr>
-        <p:txBody>
-          <a:bodyPr/>
-          <a:lstStyle/>
-          <a:p>
-            <a:endParaRPr lang="en-US"/>
-          </a:p>
-        </p:txBody>
       </p:sp>
       <p:sp>
         <p:nvSpPr>
@@ -8296,7 +8082,7 @@
           <a:bodyPr wrap="square" lIns="0" tIns="0" rIns="0" bIns="0" rtlCol="0" anchor="ctr"/>
           <a:lstStyle/>
           <a:p>
-            <a:pPr marL="0" indent="0">
+            <a:pPr indent="0" marL="0">
               <a:buNone/>
             </a:pPr>
             <a:r>
@@ -8335,7 +8121,7 @@
           <a:bodyPr wrap="square" lIns="0" tIns="0" rIns="0" bIns="0" rtlCol="0" anchor="ctr"/>
           <a:lstStyle/>
           <a:p>
-            <a:pPr marL="0" indent="0">
+            <a:pPr indent="0" marL="0">
               <a:buNone/>
             </a:pPr>
             <a:r>
@@ -8379,13 +8165,6 @@
             <a:prstDash val="solid"/>
           </a:ln>
         </p:spPr>
-        <p:txBody>
-          <a:bodyPr/>
-          <a:lstStyle/>
-          <a:p>
-            <a:endParaRPr lang="en-US"/>
-          </a:p>
-        </p:txBody>
       </p:sp>
       <p:sp>
         <p:nvSpPr>
@@ -8406,13 +8185,6 @@
           </a:solidFill>
           <a:ln/>
         </p:spPr>
-        <p:txBody>
-          <a:bodyPr/>
-          <a:lstStyle/>
-          <a:p>
-            <a:endParaRPr lang="en-US"/>
-          </a:p>
-        </p:txBody>
       </p:sp>
       <p:sp>
         <p:nvSpPr>
@@ -8435,7 +8207,7 @@
           <a:bodyPr wrap="square" lIns="0" tIns="0" rIns="0" bIns="0" rtlCol="0" anchor="ctr"/>
           <a:lstStyle/>
           <a:p>
-            <a:pPr marL="0" indent="0">
+            <a:pPr indent="0" marL="0">
               <a:buNone/>
             </a:pPr>
             <a:r>
@@ -8474,7 +8246,7 @@
           <a:bodyPr wrap="square" lIns="0" tIns="0" rIns="0" bIns="0" rtlCol="0" anchor="ctr"/>
           <a:lstStyle/>
           <a:p>
-            <a:pPr marL="0" indent="0">
+            <a:pPr indent="0" marL="0">
               <a:buNone/>
             </a:pPr>
             <a:r>
@@ -8518,13 +8290,6 @@
             <a:prstDash val="solid"/>
           </a:ln>
         </p:spPr>
-        <p:txBody>
-          <a:bodyPr/>
-          <a:lstStyle/>
-          <a:p>
-            <a:endParaRPr lang="en-US"/>
-          </a:p>
-        </p:txBody>
       </p:sp>
       <p:sp>
         <p:nvSpPr>
@@ -8545,13 +8310,6 @@
           </a:solidFill>
           <a:ln/>
         </p:spPr>
-        <p:txBody>
-          <a:bodyPr/>
-          <a:lstStyle/>
-          <a:p>
-            <a:endParaRPr lang="en-US"/>
-          </a:p>
-        </p:txBody>
       </p:sp>
       <p:sp>
         <p:nvSpPr>
@@ -8574,7 +8332,7 @@
           <a:bodyPr wrap="square" lIns="0" tIns="0" rIns="0" bIns="0" rtlCol="0" anchor="ctr"/>
           <a:lstStyle/>
           <a:p>
-            <a:pPr marL="0" indent="0">
+            <a:pPr indent="0" marL="0">
               <a:buNone/>
             </a:pPr>
             <a:r>
@@ -8613,7 +8371,7 @@
           <a:bodyPr wrap="square" lIns="0" tIns="0" rIns="0" bIns="0" rtlCol="0" anchor="ctr"/>
           <a:lstStyle/>
           <a:p>
-            <a:pPr marL="0" indent="0">
+            <a:pPr indent="0" marL="0">
               <a:buNone/>
             </a:pPr>
             <a:r>
@@ -8652,7 +8410,7 @@
           <a:bodyPr wrap="square" lIns="0" tIns="0" rIns="0" bIns="0" rtlCol="0" anchor="ctr"/>
           <a:lstStyle/>
           <a:p>
-            <a:pPr marL="0" indent="0">
+            <a:pPr indent="0" marL="0">
               <a:buNone/>
             </a:pPr>
             <a:r>
@@ -8686,7 +8444,6 @@
         <a:solidFill>
           <a:srgbClr val="0E1330"/>
         </a:solidFill>
-        <a:effectLst/>
       </p:bgPr>
     </p:bg>
     <p:spTree>
@@ -8724,7 +8481,7 @@
           <a:bodyPr wrap="square" lIns="0" tIns="0" rIns="0" bIns="0" rtlCol="0" anchor="ctr"/>
           <a:lstStyle/>
           <a:p>
-            <a:pPr marL="0" indent="0" algn="l">
+            <a:pPr algn="l" indent="0" marL="0">
               <a:buNone/>
             </a:pPr>
             <a:r>
@@ -8763,7 +8520,7 @@
           <a:bodyPr wrap="square" lIns="0" tIns="0" rIns="0" bIns="0" rtlCol="0" anchor="ctr"/>
           <a:lstStyle/>
           <a:p>
-            <a:pPr marL="0" indent="0">
+            <a:pPr indent="0" marL="0">
               <a:buNone/>
             </a:pPr>
             <a:r>
@@ -8807,13 +8564,6 @@
             <a:prstDash val="solid"/>
           </a:ln>
         </p:spPr>
-        <p:txBody>
-          <a:bodyPr/>
-          <a:lstStyle/>
-          <a:p>
-            <a:endParaRPr lang="en-US"/>
-          </a:p>
-        </p:txBody>
       </p:sp>
       <p:sp>
         <p:nvSpPr>
@@ -8834,13 +8584,6 @@
           </a:solidFill>
           <a:ln/>
         </p:spPr>
-        <p:txBody>
-          <a:bodyPr/>
-          <a:lstStyle/>
-          <a:p>
-            <a:endParaRPr lang="en-US"/>
-          </a:p>
-        </p:txBody>
       </p:sp>
       <p:sp>
         <p:nvSpPr>
@@ -8863,7 +8606,7 @@
           <a:bodyPr wrap="square" lIns="0" tIns="0" rIns="0" bIns="0" rtlCol="0" anchor="ctr"/>
           <a:lstStyle/>
           <a:p>
-            <a:pPr marL="0" indent="0">
+            <a:pPr indent="0" marL="0">
               <a:buNone/>
             </a:pPr>
             <a:r>
@@ -8899,7 +8642,7 @@
           <a:ln/>
         </p:spPr>
         <p:txBody>
-          <a:bodyPr wrap="square" lIns="0" tIns="0" rIns="0" bIns="0" rtlCol="0" anchor="ctr"/>
+          <a:bodyPr wrap="square" lIns="0" tIns="0" rIns="0" bIns="0" rtlCol="0" anchor="t"/>
           <a:lstStyle/>
           <a:p>
             <a:pPr marL="342900" indent="-342900">
@@ -9034,13 +8777,6 @@
             <a:prstDash val="solid"/>
           </a:ln>
         </p:spPr>
-        <p:txBody>
-          <a:bodyPr/>
-          <a:lstStyle/>
-          <a:p>
-            <a:endParaRPr lang="en-US"/>
-          </a:p>
-        </p:txBody>
       </p:sp>
       <p:sp>
         <p:nvSpPr>
@@ -9061,13 +8797,6 @@
           </a:solidFill>
           <a:ln/>
         </p:spPr>
-        <p:txBody>
-          <a:bodyPr/>
-          <a:lstStyle/>
-          <a:p>
-            <a:endParaRPr lang="en-US"/>
-          </a:p>
-        </p:txBody>
       </p:sp>
       <p:sp>
         <p:nvSpPr>
@@ -9090,7 +8819,7 @@
           <a:bodyPr wrap="square" lIns="0" tIns="0" rIns="0" bIns="0" rtlCol="0" anchor="ctr"/>
           <a:lstStyle/>
           <a:p>
-            <a:pPr marL="0" indent="0">
+            <a:pPr indent="0" marL="0">
               <a:buNone/>
             </a:pPr>
             <a:r>
@@ -9126,7 +8855,7 @@
           <a:ln/>
         </p:spPr>
         <p:txBody>
-          <a:bodyPr wrap="square" lIns="0" tIns="0" rIns="0" bIns="0" rtlCol="0" anchor="ctr"/>
+          <a:bodyPr wrap="square" lIns="0" tIns="0" rIns="0" bIns="0" rtlCol="0" anchor="t"/>
           <a:lstStyle/>
           <a:p>
             <a:pPr marL="342900" indent="-342900">
@@ -9256,7 +8985,7 @@
           <a:bodyPr wrap="square" lIns="0" tIns="0" rIns="0" bIns="0" rtlCol="0" anchor="ctr"/>
           <a:lstStyle/>
           <a:p>
-            <a:pPr marL="0" indent="0">
+            <a:pPr indent="0" marL="0">
               <a:buNone/>
             </a:pPr>
             <a:r>
@@ -9295,7 +9024,7 @@
           <a:bodyPr wrap="square" lIns="0" tIns="0" rIns="0" bIns="0" rtlCol="0" anchor="ctr"/>
           <a:lstStyle/>
           <a:p>
-            <a:pPr marL="0" indent="0" algn="l">
+            <a:pPr algn="l" indent="0" marL="0">
               <a:buNone/>
             </a:pPr>
             <a:r>
@@ -9334,7 +9063,7 @@
           <a:bodyPr wrap="square" lIns="0" tIns="0" rIns="0" bIns="0" rtlCol="0" anchor="ctr"/>
           <a:lstStyle/>
           <a:p>
-            <a:pPr marL="0" indent="0" algn="r">
+            <a:pPr algn="r" indent="0" marL="0">
               <a:buNone/>
             </a:pPr>
             <a:r>
@@ -9368,7 +9097,6 @@
         <a:solidFill>
           <a:srgbClr val="0E1330"/>
         </a:solidFill>
-        <a:effectLst/>
       </p:bgPr>
     </p:bg>
     <p:spTree>
@@ -9406,7 +9134,7 @@
           <a:bodyPr wrap="square" lIns="0" tIns="0" rIns="0" bIns="0" rtlCol="0" anchor="ctr"/>
           <a:lstStyle/>
           <a:p>
-            <a:pPr marL="0" indent="0" algn="l">
+            <a:pPr algn="l" indent="0" marL="0">
               <a:buNone/>
             </a:pPr>
             <a:r>
@@ -9445,7 +9173,7 @@
           <a:bodyPr wrap="square" lIns="0" tIns="0" rIns="0" bIns="0" rtlCol="0" anchor="ctr"/>
           <a:lstStyle/>
           <a:p>
-            <a:pPr marL="0" indent="0">
+            <a:pPr indent="0" marL="0">
               <a:buNone/>
             </a:pPr>
             <a:r>
@@ -9489,13 +9217,6 @@
             <a:prstDash val="solid"/>
           </a:ln>
         </p:spPr>
-        <p:txBody>
-          <a:bodyPr/>
-          <a:lstStyle/>
-          <a:p>
-            <a:endParaRPr lang="en-US"/>
-          </a:p>
-        </p:txBody>
       </p:sp>
       <p:sp>
         <p:nvSpPr>
@@ -9516,13 +9237,6 @@
           </a:solidFill>
           <a:ln/>
         </p:spPr>
-        <p:txBody>
-          <a:bodyPr/>
-          <a:lstStyle/>
-          <a:p>
-            <a:endParaRPr lang="en-US"/>
-          </a:p>
-        </p:txBody>
       </p:sp>
       <p:sp>
         <p:nvSpPr>
@@ -9545,7 +9259,7 @@
           <a:bodyPr wrap="square" lIns="0" tIns="0" rIns="0" bIns="0" rtlCol="0" anchor="ctr"/>
           <a:lstStyle/>
           <a:p>
-            <a:pPr marL="0" indent="0">
+            <a:pPr indent="0" marL="0">
               <a:buNone/>
             </a:pPr>
             <a:r>
@@ -9584,7 +9298,7 @@
           <a:bodyPr wrap="square" lIns="0" tIns="0" rIns="0" bIns="0" rtlCol="0" anchor="ctr"/>
           <a:lstStyle/>
           <a:p>
-            <a:pPr marL="0" indent="0">
+            <a:pPr indent="0" marL="0">
               <a:buNone/>
             </a:pPr>
             <a:r>
@@ -9623,11 +9337,11 @@
           <a:bodyPr wrap="square" lIns="0" tIns="0" rIns="0" bIns="0" rtlCol="0" anchor="ctr"/>
           <a:lstStyle/>
           <a:p>
-            <a:pPr marL="0" indent="0">
-              <a:buNone/>
-            </a:pPr>
-            <a:r>
-              <a:rPr lang="en-US" sz="950" kern="0" spc="100" dirty="0">
+            <a:pPr indent="0" marL="0">
+              <a:buNone/>
+            </a:pPr>
+            <a:r>
+              <a:rPr lang="en-US" sz="950" spc="100" kern="0" dirty="0">
                 <a:solidFill>
                   <a:srgbClr val="99A2CC"/>
                 </a:solidFill>
@@ -9667,13 +9381,6 @@
             <a:prstDash val="solid"/>
           </a:ln>
         </p:spPr>
-        <p:txBody>
-          <a:bodyPr/>
-          <a:lstStyle/>
-          <a:p>
-            <a:endParaRPr lang="en-US"/>
-          </a:p>
-        </p:txBody>
       </p:sp>
       <p:sp>
         <p:nvSpPr>
@@ -9694,13 +9401,6 @@
           </a:solidFill>
           <a:ln/>
         </p:spPr>
-        <p:txBody>
-          <a:bodyPr/>
-          <a:lstStyle/>
-          <a:p>
-            <a:endParaRPr lang="en-US"/>
-          </a:p>
-        </p:txBody>
       </p:sp>
       <p:sp>
         <p:nvSpPr>
@@ -9723,7 +9423,7 @@
           <a:bodyPr wrap="square" lIns="0" tIns="0" rIns="0" bIns="0" rtlCol="0" anchor="ctr"/>
           <a:lstStyle/>
           <a:p>
-            <a:pPr marL="0" indent="0">
+            <a:pPr indent="0" marL="0">
               <a:buNone/>
             </a:pPr>
             <a:r>
@@ -9762,7 +9462,7 @@
           <a:bodyPr wrap="square" lIns="0" tIns="0" rIns="0" bIns="0" rtlCol="0" anchor="ctr"/>
           <a:lstStyle/>
           <a:p>
-            <a:pPr marL="0" indent="0">
+            <a:pPr indent="0" marL="0">
               <a:buNone/>
             </a:pPr>
             <a:r>
@@ -9801,11 +9501,11 @@
           <a:bodyPr wrap="square" lIns="0" tIns="0" rIns="0" bIns="0" rtlCol="0" anchor="ctr"/>
           <a:lstStyle/>
           <a:p>
-            <a:pPr marL="0" indent="0">
-              <a:buNone/>
-            </a:pPr>
-            <a:r>
-              <a:rPr lang="en-US" sz="950" kern="0" spc="100" dirty="0">
+            <a:pPr indent="0" marL="0">
+              <a:buNone/>
+            </a:pPr>
+            <a:r>
+              <a:rPr lang="en-US" sz="950" spc="100" kern="0" dirty="0">
                 <a:solidFill>
                   <a:srgbClr val="99A2CC"/>
                 </a:solidFill>
@@ -9845,13 +9545,6 @@
             <a:prstDash val="solid"/>
           </a:ln>
         </p:spPr>
-        <p:txBody>
-          <a:bodyPr/>
-          <a:lstStyle/>
-          <a:p>
-            <a:endParaRPr lang="en-US"/>
-          </a:p>
-        </p:txBody>
       </p:sp>
       <p:sp>
         <p:nvSpPr>
@@ -9872,13 +9565,6 @@
           </a:solidFill>
           <a:ln/>
         </p:spPr>
-        <p:txBody>
-          <a:bodyPr/>
-          <a:lstStyle/>
-          <a:p>
-            <a:endParaRPr lang="en-US"/>
-          </a:p>
-        </p:txBody>
       </p:sp>
       <p:sp>
         <p:nvSpPr>
@@ -9901,7 +9587,7 @@
           <a:bodyPr wrap="square" lIns="0" tIns="0" rIns="0" bIns="0" rtlCol="0" anchor="ctr"/>
           <a:lstStyle/>
           <a:p>
-            <a:pPr marL="0" indent="0">
+            <a:pPr indent="0" marL="0">
               <a:buNone/>
             </a:pPr>
             <a:r>
@@ -9940,7 +9626,7 @@
           <a:bodyPr wrap="square" lIns="0" tIns="0" rIns="0" bIns="0" rtlCol="0" anchor="ctr"/>
           <a:lstStyle/>
           <a:p>
-            <a:pPr marL="0" indent="0">
+            <a:pPr indent="0" marL="0">
               <a:buNone/>
             </a:pPr>
             <a:r>
@@ -9979,11 +9665,11 @@
           <a:bodyPr wrap="square" lIns="0" tIns="0" rIns="0" bIns="0" rtlCol="0" anchor="ctr"/>
           <a:lstStyle/>
           <a:p>
-            <a:pPr marL="0" indent="0">
-              <a:buNone/>
-            </a:pPr>
-            <a:r>
-              <a:rPr lang="en-US" sz="950" kern="0" spc="100" dirty="0">
+            <a:pPr indent="0" marL="0">
+              <a:buNone/>
+            </a:pPr>
+            <a:r>
+              <a:rPr lang="en-US" sz="950" spc="100" kern="0" dirty="0">
                 <a:solidFill>
                   <a:srgbClr val="99A2CC"/>
                 </a:solidFill>
@@ -10023,13 +9709,6 @@
             <a:prstDash val="solid"/>
           </a:ln>
         </p:spPr>
-        <p:txBody>
-          <a:bodyPr/>
-          <a:lstStyle/>
-          <a:p>
-            <a:endParaRPr lang="en-US"/>
-          </a:p>
-        </p:txBody>
       </p:sp>
       <p:sp>
         <p:nvSpPr>
@@ -10050,13 +9729,6 @@
           </a:solidFill>
           <a:ln/>
         </p:spPr>
-        <p:txBody>
-          <a:bodyPr/>
-          <a:lstStyle/>
-          <a:p>
-            <a:endParaRPr lang="en-US"/>
-          </a:p>
-        </p:txBody>
       </p:sp>
       <p:sp>
         <p:nvSpPr>
@@ -10079,7 +9751,7 @@
           <a:bodyPr wrap="square" lIns="0" tIns="0" rIns="0" bIns="0" rtlCol="0" anchor="ctr"/>
           <a:lstStyle/>
           <a:p>
-            <a:pPr marL="0" indent="0">
+            <a:pPr indent="0" marL="0">
               <a:buNone/>
             </a:pPr>
             <a:r>
@@ -10118,7 +9790,7 @@
           <a:bodyPr wrap="square" lIns="0" tIns="0" rIns="0" bIns="0" rtlCol="0" anchor="ctr"/>
           <a:lstStyle/>
           <a:p>
-            <a:pPr marL="0" indent="0">
+            <a:pPr indent="0" marL="0">
               <a:buNone/>
             </a:pPr>
             <a:r>
@@ -10157,11 +9829,11 @@
           <a:bodyPr wrap="square" lIns="0" tIns="0" rIns="0" bIns="0" rtlCol="0" anchor="ctr"/>
           <a:lstStyle/>
           <a:p>
-            <a:pPr marL="0" indent="0">
-              <a:buNone/>
-            </a:pPr>
-            <a:r>
-              <a:rPr lang="en-US" sz="950" kern="0" spc="100" dirty="0">
+            <a:pPr indent="0" marL="0">
+              <a:buNone/>
+            </a:pPr>
+            <a:r>
+              <a:rPr lang="en-US" sz="950" spc="100" kern="0" dirty="0">
                 <a:solidFill>
                   <a:srgbClr val="99A2CC"/>
                 </a:solidFill>
@@ -10201,13 +9873,6 @@
             <a:prstDash val="solid"/>
           </a:ln>
         </p:spPr>
-        <p:txBody>
-          <a:bodyPr/>
-          <a:lstStyle/>
-          <a:p>
-            <a:endParaRPr lang="en-US"/>
-          </a:p>
-        </p:txBody>
       </p:sp>
       <p:sp>
         <p:nvSpPr>
@@ -10228,13 +9893,6 @@
           </a:solidFill>
           <a:ln/>
         </p:spPr>
-        <p:txBody>
-          <a:bodyPr/>
-          <a:lstStyle/>
-          <a:p>
-            <a:endParaRPr lang="en-US"/>
-          </a:p>
-        </p:txBody>
       </p:sp>
       <p:sp>
         <p:nvSpPr>
@@ -10257,7 +9915,7 @@
           <a:bodyPr wrap="square" lIns="0" tIns="0" rIns="0" bIns="0" rtlCol="0" anchor="ctr"/>
           <a:lstStyle/>
           <a:p>
-            <a:pPr marL="0" indent="0">
+            <a:pPr indent="0" marL="0">
               <a:buNone/>
             </a:pPr>
             <a:r>
@@ -10296,7 +9954,7 @@
           <a:bodyPr wrap="square" lIns="0" tIns="0" rIns="0" bIns="0" rtlCol="0" anchor="ctr"/>
           <a:lstStyle/>
           <a:p>
-            <a:pPr marL="0" indent="0">
+            <a:pPr indent="0" marL="0">
               <a:buNone/>
             </a:pPr>
             <a:r>
@@ -10335,11 +9993,11 @@
           <a:bodyPr wrap="square" lIns="0" tIns="0" rIns="0" bIns="0" rtlCol="0" anchor="ctr"/>
           <a:lstStyle/>
           <a:p>
-            <a:pPr marL="0" indent="0">
-              <a:buNone/>
-            </a:pPr>
-            <a:r>
-              <a:rPr lang="en-US" sz="950" kern="0" spc="100" dirty="0">
+            <a:pPr indent="0" marL="0">
+              <a:buNone/>
+            </a:pPr>
+            <a:r>
+              <a:rPr lang="en-US" sz="950" spc="100" kern="0" dirty="0">
                 <a:solidFill>
                   <a:srgbClr val="99A2CC"/>
                 </a:solidFill>
@@ -10379,13 +10037,6 @@
             <a:prstDash val="solid"/>
           </a:ln>
         </p:spPr>
-        <p:txBody>
-          <a:bodyPr/>
-          <a:lstStyle/>
-          <a:p>
-            <a:endParaRPr lang="en-US"/>
-          </a:p>
-        </p:txBody>
       </p:sp>
       <p:sp>
         <p:nvSpPr>
@@ -10406,13 +10057,6 @@
           </a:solidFill>
           <a:ln/>
         </p:spPr>
-        <p:txBody>
-          <a:bodyPr/>
-          <a:lstStyle/>
-          <a:p>
-            <a:endParaRPr lang="en-US"/>
-          </a:p>
-        </p:txBody>
       </p:sp>
       <p:sp>
         <p:nvSpPr>
@@ -10435,7 +10079,7 @@
           <a:bodyPr wrap="square" lIns="0" tIns="0" rIns="0" bIns="0" rtlCol="0" anchor="ctr"/>
           <a:lstStyle/>
           <a:p>
-            <a:pPr marL="0" indent="0">
+            <a:pPr indent="0" marL="0">
               <a:buNone/>
             </a:pPr>
             <a:r>
@@ -10474,7 +10118,7 @@
           <a:bodyPr wrap="square" lIns="0" tIns="0" rIns="0" bIns="0" rtlCol="0" anchor="ctr"/>
           <a:lstStyle/>
           <a:p>
-            <a:pPr marL="0" indent="0">
+            <a:pPr indent="0" marL="0">
               <a:buNone/>
             </a:pPr>
             <a:r>
@@ -10513,11 +10157,11 @@
           <a:bodyPr wrap="square" lIns="0" tIns="0" rIns="0" bIns="0" rtlCol="0" anchor="ctr"/>
           <a:lstStyle/>
           <a:p>
-            <a:pPr marL="0" indent="0">
-              <a:buNone/>
-            </a:pPr>
-            <a:r>
-              <a:rPr lang="en-US" sz="950" kern="0" spc="100" dirty="0">
+            <a:pPr indent="0" marL="0">
+              <a:buNone/>
+            </a:pPr>
+            <a:r>
+              <a:rPr lang="en-US" sz="950" spc="100" kern="0" dirty="0">
                 <a:solidFill>
                   <a:srgbClr val="99A2CC"/>
                 </a:solidFill>
@@ -10557,13 +10201,6 @@
             <a:prstDash val="solid"/>
           </a:ln>
         </p:spPr>
-        <p:txBody>
-          <a:bodyPr/>
-          <a:lstStyle/>
-          <a:p>
-            <a:endParaRPr lang="en-US"/>
-          </a:p>
-        </p:txBody>
       </p:sp>
       <p:sp>
         <p:nvSpPr>
@@ -10584,13 +10221,6 @@
           </a:solidFill>
           <a:ln/>
         </p:spPr>
-        <p:txBody>
-          <a:bodyPr/>
-          <a:lstStyle/>
-          <a:p>
-            <a:endParaRPr lang="en-US"/>
-          </a:p>
-        </p:txBody>
       </p:sp>
       <p:sp>
         <p:nvSpPr>
@@ -10613,7 +10243,7 @@
           <a:bodyPr wrap="square" lIns="0" tIns="0" rIns="0" bIns="0" rtlCol="0" anchor="ctr"/>
           <a:lstStyle/>
           <a:p>
-            <a:pPr marL="0" indent="0">
+            <a:pPr indent="0" marL="0">
               <a:buNone/>
             </a:pPr>
             <a:r>
@@ -10652,7 +10282,7 @@
           <a:bodyPr wrap="square" lIns="0" tIns="0" rIns="0" bIns="0" rtlCol="0" anchor="ctr"/>
           <a:lstStyle/>
           <a:p>
-            <a:pPr marL="0" indent="0">
+            <a:pPr indent="0" marL="0">
               <a:buNone/>
             </a:pPr>
             <a:r>
@@ -10691,11 +10321,11 @@
           <a:bodyPr wrap="square" lIns="0" tIns="0" rIns="0" bIns="0" rtlCol="0" anchor="ctr"/>
           <a:lstStyle/>
           <a:p>
-            <a:pPr marL="0" indent="0">
-              <a:buNone/>
-            </a:pPr>
-            <a:r>
-              <a:rPr lang="en-US" sz="950" kern="0" spc="100" dirty="0">
+            <a:pPr indent="0" marL="0">
+              <a:buNone/>
+            </a:pPr>
+            <a:r>
+              <a:rPr lang="en-US" sz="950" spc="100" kern="0" dirty="0">
                 <a:solidFill>
                   <a:srgbClr val="99A2CC"/>
                 </a:solidFill>
@@ -10735,13 +10365,6 @@
             <a:prstDash val="solid"/>
           </a:ln>
         </p:spPr>
-        <p:txBody>
-          <a:bodyPr/>
-          <a:lstStyle/>
-          <a:p>
-            <a:endParaRPr lang="en-US"/>
-          </a:p>
-        </p:txBody>
       </p:sp>
       <p:sp>
         <p:nvSpPr>
@@ -10762,13 +10385,6 @@
           </a:solidFill>
           <a:ln/>
         </p:spPr>
-        <p:txBody>
-          <a:bodyPr/>
-          <a:lstStyle/>
-          <a:p>
-            <a:endParaRPr lang="en-US"/>
-          </a:p>
-        </p:txBody>
       </p:sp>
       <p:sp>
         <p:nvSpPr>
@@ -10791,7 +10407,7 @@
           <a:bodyPr wrap="square" lIns="0" tIns="0" rIns="0" bIns="0" rtlCol="0" anchor="ctr"/>
           <a:lstStyle/>
           <a:p>
-            <a:pPr marL="0" indent="0">
+            <a:pPr indent="0" marL="0">
               <a:buNone/>
             </a:pPr>
             <a:r>
@@ -10830,7 +10446,7 @@
           <a:bodyPr wrap="square" lIns="0" tIns="0" rIns="0" bIns="0" rtlCol="0" anchor="ctr"/>
           <a:lstStyle/>
           <a:p>
-            <a:pPr marL="0" indent="0">
+            <a:pPr indent="0" marL="0">
               <a:buNone/>
             </a:pPr>
             <a:r>
@@ -10869,11 +10485,11 @@
           <a:bodyPr wrap="square" lIns="0" tIns="0" rIns="0" bIns="0" rtlCol="0" anchor="ctr"/>
           <a:lstStyle/>
           <a:p>
-            <a:pPr marL="0" indent="0">
-              <a:buNone/>
-            </a:pPr>
-            <a:r>
-              <a:rPr lang="en-US" sz="950" kern="0" spc="100" dirty="0">
+            <a:pPr indent="0" marL="0">
+              <a:buNone/>
+            </a:pPr>
+            <a:r>
+              <a:rPr lang="en-US" sz="950" spc="100" kern="0" dirty="0">
                 <a:solidFill>
                   <a:srgbClr val="99A2CC"/>
                 </a:solidFill>
@@ -10913,13 +10529,6 @@
             <a:prstDash val="solid"/>
           </a:ln>
         </p:spPr>
-        <p:txBody>
-          <a:bodyPr/>
-          <a:lstStyle/>
-          <a:p>
-            <a:endParaRPr lang="en-US"/>
-          </a:p>
-        </p:txBody>
       </p:sp>
       <p:sp>
         <p:nvSpPr>
@@ -10940,13 +10549,6 @@
           </a:solidFill>
           <a:ln/>
         </p:spPr>
-        <p:txBody>
-          <a:bodyPr/>
-          <a:lstStyle/>
-          <a:p>
-            <a:endParaRPr lang="en-US"/>
-          </a:p>
-        </p:txBody>
       </p:sp>
       <p:sp>
         <p:nvSpPr>
@@ -10969,7 +10571,7 @@
           <a:bodyPr wrap="square" lIns="0" tIns="0" rIns="0" bIns="0" rtlCol="0" anchor="ctr"/>
           <a:lstStyle/>
           <a:p>
-            <a:pPr marL="0" indent="0">
+            <a:pPr indent="0" marL="0">
               <a:buNone/>
             </a:pPr>
             <a:r>
@@ -11008,7 +10610,7 @@
           <a:bodyPr wrap="square" lIns="0" tIns="0" rIns="0" bIns="0" rtlCol="0" anchor="ctr"/>
           <a:lstStyle/>
           <a:p>
-            <a:pPr marL="0" indent="0">
+            <a:pPr indent="0" marL="0">
               <a:buNone/>
             </a:pPr>
             <a:r>
@@ -11047,11 +10649,11 @@
           <a:bodyPr wrap="square" lIns="0" tIns="0" rIns="0" bIns="0" rtlCol="0" anchor="ctr"/>
           <a:lstStyle/>
           <a:p>
-            <a:pPr marL="0" indent="0">
-              <a:buNone/>
-            </a:pPr>
-            <a:r>
-              <a:rPr lang="en-US" sz="950" kern="0" spc="100" dirty="0">
+            <a:pPr indent="0" marL="0">
+              <a:buNone/>
+            </a:pPr>
+            <a:r>
+              <a:rPr lang="en-US" sz="950" spc="100" kern="0" dirty="0">
                 <a:solidFill>
                   <a:srgbClr val="99A2CC"/>
                 </a:solidFill>
@@ -11091,13 +10693,6 @@
             <a:prstDash val="solid"/>
           </a:ln>
         </p:spPr>
-        <p:txBody>
-          <a:bodyPr/>
-          <a:lstStyle/>
-          <a:p>
-            <a:endParaRPr lang="en-US"/>
-          </a:p>
-        </p:txBody>
       </p:sp>
       <p:sp>
         <p:nvSpPr>
@@ -11118,13 +10713,6 @@
           </a:solidFill>
           <a:ln/>
         </p:spPr>
-        <p:txBody>
-          <a:bodyPr/>
-          <a:lstStyle/>
-          <a:p>
-            <a:endParaRPr lang="en-US"/>
-          </a:p>
-        </p:txBody>
       </p:sp>
       <p:sp>
         <p:nvSpPr>
@@ -11147,7 +10735,7 @@
           <a:bodyPr wrap="square" lIns="0" tIns="0" rIns="0" bIns="0" rtlCol="0" anchor="ctr"/>
           <a:lstStyle/>
           <a:p>
-            <a:pPr marL="0" indent="0">
+            <a:pPr indent="0" marL="0">
               <a:buNone/>
             </a:pPr>
             <a:r>
@@ -11186,7 +10774,7 @@
           <a:bodyPr wrap="square" lIns="0" tIns="0" rIns="0" bIns="0" rtlCol="0" anchor="ctr"/>
           <a:lstStyle/>
           <a:p>
-            <a:pPr marL="0" indent="0">
+            <a:pPr indent="0" marL="0">
               <a:buNone/>
             </a:pPr>
             <a:r>
@@ -11225,11 +10813,11 @@
           <a:bodyPr wrap="square" lIns="0" tIns="0" rIns="0" bIns="0" rtlCol="0" anchor="ctr"/>
           <a:lstStyle/>
           <a:p>
-            <a:pPr marL="0" indent="0">
-              <a:buNone/>
-            </a:pPr>
-            <a:r>
-              <a:rPr lang="en-US" sz="950" kern="0" spc="100" dirty="0">
+            <a:pPr indent="0" marL="0">
+              <a:buNone/>
+            </a:pPr>
+            <a:r>
+              <a:rPr lang="en-US" sz="950" spc="100" kern="0" dirty="0">
                 <a:solidFill>
                   <a:srgbClr val="99A2CC"/>
                 </a:solidFill>
@@ -11264,7 +10852,7 @@
           <a:bodyPr wrap="square" lIns="0" tIns="0" rIns="0" bIns="0" rtlCol="0" anchor="ctr"/>
           <a:lstStyle/>
           <a:p>
-            <a:pPr marL="0" indent="0" algn="l">
+            <a:pPr algn="l" indent="0" marL="0">
               <a:buNone/>
             </a:pPr>
             <a:r>
@@ -11303,7 +10891,7 @@
           <a:bodyPr wrap="square" lIns="0" tIns="0" rIns="0" bIns="0" rtlCol="0" anchor="ctr"/>
           <a:lstStyle/>
           <a:p>
-            <a:pPr marL="0" indent="0" algn="r">
+            <a:pPr algn="r" indent="0" marL="0">
               <a:buNone/>
             </a:pPr>
             <a:r>
@@ -11337,7 +10925,6 @@
         <a:solidFill>
           <a:srgbClr val="0E1330"/>
         </a:solidFill>
-        <a:effectLst/>
       </p:bgPr>
     </p:bg>
     <p:spTree>
@@ -11373,13 +10960,6 @@
           </a:solidFill>
           <a:ln/>
         </p:spPr>
-        <p:txBody>
-          <a:bodyPr/>
-          <a:lstStyle/>
-          <a:p>
-            <a:endParaRPr lang="en-US"/>
-          </a:p>
-        </p:txBody>
       </p:sp>
       <p:sp>
         <p:nvSpPr>
@@ -11400,13 +10980,6 @@
           </a:solidFill>
           <a:ln/>
         </p:spPr>
-        <p:txBody>
-          <a:bodyPr/>
-          <a:lstStyle/>
-          <a:p>
-            <a:endParaRPr lang="en-US"/>
-          </a:p>
-        </p:txBody>
       </p:sp>
       <p:sp>
         <p:nvSpPr>
@@ -11427,13 +11000,6 @@
           </a:solidFill>
           <a:ln/>
         </p:spPr>
-        <p:txBody>
-          <a:bodyPr/>
-          <a:lstStyle/>
-          <a:p>
-            <a:endParaRPr lang="en-US"/>
-          </a:p>
-        </p:txBody>
       </p:sp>
       <p:sp>
         <p:nvSpPr>
@@ -11454,13 +11020,6 @@
           </a:solidFill>
           <a:ln/>
         </p:spPr>
-        <p:txBody>
-          <a:bodyPr/>
-          <a:lstStyle/>
-          <a:p>
-            <a:endParaRPr lang="en-US"/>
-          </a:p>
-        </p:txBody>
       </p:sp>
       <p:sp>
         <p:nvSpPr>
@@ -11481,13 +11040,6 @@
           </a:solidFill>
           <a:ln/>
         </p:spPr>
-        <p:txBody>
-          <a:bodyPr/>
-          <a:lstStyle/>
-          <a:p>
-            <a:endParaRPr lang="en-US"/>
-          </a:p>
-        </p:txBody>
       </p:sp>
       <p:sp>
         <p:nvSpPr>
@@ -11508,13 +11060,6 @@
           </a:solidFill>
           <a:ln/>
         </p:spPr>
-        <p:txBody>
-          <a:bodyPr/>
-          <a:lstStyle/>
-          <a:p>
-            <a:endParaRPr lang="en-US"/>
-          </a:p>
-        </p:txBody>
       </p:sp>
       <p:sp>
         <p:nvSpPr>
@@ -11535,13 +11080,6 @@
           </a:solidFill>
           <a:ln/>
         </p:spPr>
-        <p:txBody>
-          <a:bodyPr/>
-          <a:lstStyle/>
-          <a:p>
-            <a:endParaRPr lang="en-US"/>
-          </a:p>
-        </p:txBody>
       </p:sp>
       <p:sp>
         <p:nvSpPr>
@@ -11562,13 +11100,6 @@
           </a:solidFill>
           <a:ln/>
         </p:spPr>
-        <p:txBody>
-          <a:bodyPr/>
-          <a:lstStyle/>
-          <a:p>
-            <a:endParaRPr lang="en-US"/>
-          </a:p>
-        </p:txBody>
       </p:sp>
       <p:sp>
         <p:nvSpPr>
@@ -11589,13 +11120,6 @@
           </a:solidFill>
           <a:ln/>
         </p:spPr>
-        <p:txBody>
-          <a:bodyPr/>
-          <a:lstStyle/>
-          <a:p>
-            <a:endParaRPr lang="en-US"/>
-          </a:p>
-        </p:txBody>
       </p:sp>
       <p:sp>
         <p:nvSpPr>
@@ -11616,13 +11140,6 @@
           </a:solidFill>
           <a:ln/>
         </p:spPr>
-        <p:txBody>
-          <a:bodyPr/>
-          <a:lstStyle/>
-          <a:p>
-            <a:endParaRPr lang="en-US"/>
-          </a:p>
-        </p:txBody>
       </p:sp>
       <p:sp>
         <p:nvSpPr>
@@ -11645,11 +11162,11 @@
           <a:bodyPr wrap="square" lIns="0" tIns="0" rIns="0" bIns="0" rtlCol="0" anchor="ctr"/>
           <a:lstStyle/>
           <a:p>
-            <a:pPr marL="0" indent="0" algn="l">
-              <a:buNone/>
-            </a:pPr>
-            <a:r>
-              <a:rPr lang="en-US" sz="1100" b="1" kern="0" spc="100" dirty="0">
+            <a:pPr algn="l" indent="0" marL="0">
+              <a:buNone/>
+            </a:pPr>
+            <a:r>
+              <a:rPr lang="en-US" sz="1100" b="1" spc="100" kern="0" dirty="0">
                 <a:solidFill>
                   <a:srgbClr val="8892C4"/>
                 </a:solidFill>
@@ -11659,8 +11176,11 @@
               </a:rPr>
               <a:t>STAGE 01  </a:t>
             </a:r>
-            <a:r>
-              <a:rPr lang="en-US" sz="1100" kern="0" spc="100" dirty="0">
+            <a:pPr algn="l" indent="0" marL="0">
+              <a:buNone/>
+            </a:pPr>
+            <a:r>
+              <a:rPr lang="en-US" sz="1100" spc="100" kern="0" dirty="0">
                 <a:solidFill>
                   <a:srgbClr val="99A2CC"/>
                 </a:solidFill>
@@ -11695,7 +11215,7 @@
           <a:bodyPr wrap="square" lIns="0" tIns="0" rIns="0" bIns="0" rtlCol="0" anchor="ctr"/>
           <a:lstStyle/>
           <a:p>
-            <a:pPr marL="0" indent="0">
+            <a:pPr indent="0" marL="0">
               <a:buNone/>
             </a:pPr>
             <a:r>
@@ -11731,7 +11251,7 @@
           <a:ln/>
         </p:spPr>
         <p:txBody>
-          <a:bodyPr wrap="square" lIns="0" tIns="0" rIns="0" bIns="0" rtlCol="0" anchor="ctr"/>
+          <a:bodyPr wrap="square" lIns="0" tIns="0" rIns="0" bIns="0" rtlCol="0" anchor="t"/>
           <a:lstStyle/>
           <a:p>
             <a:pPr marL="342900" indent="-342900">
@@ -11797,7 +11317,7 @@
             <a:endParaRPr lang="en-US" sz="1500" dirty="0"/>
           </a:p>
           <a:p>
-            <a:pPr marL="685800" lvl="1" indent="-342900">
+            <a:pPr lvl="1" marL="685800" indent="-342900">
               <a:lnSpc>
                 <a:spcPct val="128000"/>
               </a:lnSpc>
@@ -11818,7 +11338,7 @@
             <a:endParaRPr lang="en-US" sz="1500" dirty="0"/>
           </a:p>
           <a:p>
-            <a:pPr marL="685800" lvl="1" indent="-342900">
+            <a:pPr lvl="1" marL="685800" indent="-342900">
               <a:lnSpc>
                 <a:spcPct val="128000"/>
               </a:lnSpc>
@@ -11887,13 +11407,6 @@
             <a:prstDash val="solid"/>
           </a:ln>
         </p:spPr>
-        <p:txBody>
-          <a:bodyPr/>
-          <a:lstStyle/>
-          <a:p>
-            <a:endParaRPr lang="en-US"/>
-          </a:p>
-        </p:txBody>
       </p:sp>
       <p:sp>
         <p:nvSpPr>
@@ -11916,11 +11429,11 @@
           <a:bodyPr wrap="square" lIns="0" tIns="0" rIns="0" bIns="0" rtlCol="0" anchor="ctr"/>
           <a:lstStyle/>
           <a:p>
-            <a:pPr marL="0" indent="0">
-              <a:buNone/>
-            </a:pPr>
-            <a:r>
-              <a:rPr lang="en-US" sz="1050" kern="0" spc="100" dirty="0">
+            <a:pPr indent="0" marL="0">
+              <a:buNone/>
+            </a:pPr>
+            <a:r>
+              <a:rPr lang="en-US" sz="1050" spc="100" kern="0" dirty="0">
                 <a:solidFill>
                   <a:srgbClr val="8892C4"/>
                 </a:solidFill>
@@ -11956,13 +11469,6 @@
             <a:prstDash val="solid"/>
           </a:ln>
         </p:spPr>
-        <p:txBody>
-          <a:bodyPr/>
-          <a:lstStyle/>
-          <a:p>
-            <a:endParaRPr lang="en-US"/>
-          </a:p>
-        </p:txBody>
       </p:sp>
       <p:sp>
         <p:nvSpPr>
@@ -11982,10 +11488,10 @@
           <a:ln/>
         </p:spPr>
         <p:txBody>
-          <a:bodyPr wrap="square" lIns="0" tIns="0" rIns="0" bIns="0" rtlCol="0" anchor="ctr"/>
-          <a:lstStyle/>
-          <a:p>
-            <a:pPr marL="0" indent="0">
+          <a:bodyPr wrap="square" lIns="0" tIns="0" rIns="0" bIns="0" rtlCol="0" anchor="t"/>
+          <a:lstStyle/>
+          <a:p>
+            <a:pPr indent="0" marL="0">
               <a:lnSpc>
                 <a:spcPct val="112000"/>
               </a:lnSpc>
@@ -12005,7 +11511,7 @@
             <a:endParaRPr lang="en-US" sz="1000" dirty="0"/>
           </a:p>
           <a:p>
-            <a:pPr marL="0" indent="0">
+            <a:pPr indent="0" marL="0">
               <a:lnSpc>
                 <a:spcPct val="112000"/>
               </a:lnSpc>
@@ -12025,7 +11531,7 @@
             <a:endParaRPr lang="en-US" sz="1000" dirty="0"/>
           </a:p>
           <a:p>
-            <a:pPr marL="0" indent="0">
+            <a:pPr indent="0" marL="0">
               <a:lnSpc>
                 <a:spcPct val="112000"/>
               </a:lnSpc>
@@ -12045,7 +11551,7 @@
             <a:endParaRPr lang="en-US" sz="1000" dirty="0"/>
           </a:p>
           <a:p>
-            <a:pPr marL="0" indent="0">
+            <a:pPr indent="0" marL="0">
               <a:lnSpc>
                 <a:spcPct val="112000"/>
               </a:lnSpc>
@@ -12065,7 +11571,7 @@
             <a:endParaRPr lang="en-US" sz="1000" dirty="0"/>
           </a:p>
           <a:p>
-            <a:pPr marL="0" indent="0">
+            <a:pPr indent="0" marL="0">
               <a:lnSpc>
                 <a:spcPct val="112000"/>
               </a:lnSpc>
@@ -12085,7 +11591,7 @@
             <a:endParaRPr lang="en-US" sz="1000" dirty="0"/>
           </a:p>
           <a:p>
-            <a:pPr marL="0" indent="0">
+            <a:pPr indent="0" marL="0">
               <a:lnSpc>
                 <a:spcPct val="112000"/>
               </a:lnSpc>
@@ -12105,7 +11611,7 @@
             <a:endParaRPr lang="en-US" sz="1000" dirty="0"/>
           </a:p>
           <a:p>
-            <a:pPr marL="0" indent="0">
+            <a:pPr indent="0" marL="0">
               <a:lnSpc>
                 <a:spcPct val="112000"/>
               </a:lnSpc>
@@ -12125,7 +11631,7 @@
             <a:endParaRPr lang="en-US" sz="1000" dirty="0"/>
           </a:p>
           <a:p>
-            <a:pPr marL="0" indent="0">
+            <a:pPr indent="0" marL="0">
               <a:lnSpc>
                 <a:spcPct val="112000"/>
               </a:lnSpc>
@@ -12134,7 +11640,7 @@
             <a:endParaRPr lang="en-US" sz="1000" dirty="0"/>
           </a:p>
           <a:p>
-            <a:pPr marL="0" indent="0">
+            <a:pPr indent="0" marL="0">
               <a:lnSpc>
                 <a:spcPct val="112000"/>
               </a:lnSpc>
@@ -12176,7 +11682,7 @@
           <a:bodyPr wrap="square" lIns="0" tIns="0" rIns="0" bIns="0" rtlCol="0" anchor="ctr"/>
           <a:lstStyle/>
           <a:p>
-            <a:pPr marL="0" indent="0" algn="l">
+            <a:pPr algn="l" indent="0" marL="0">
               <a:buNone/>
             </a:pPr>
             <a:r>
@@ -12215,7 +11721,7 @@
           <a:bodyPr wrap="square" lIns="0" tIns="0" rIns="0" bIns="0" rtlCol="0" anchor="ctr"/>
           <a:lstStyle/>
           <a:p>
-            <a:pPr marL="0" indent="0" algn="r">
+            <a:pPr algn="r" indent="0" marL="0">
               <a:buNone/>
             </a:pPr>
             <a:r>
@@ -12249,7 +11755,6 @@
         <a:solidFill>
           <a:srgbClr val="0E1330"/>
         </a:solidFill>
-        <a:effectLst/>
       </p:bgPr>
     </p:bg>
     <p:spTree>
@@ -12285,13 +11790,6 @@
           </a:solidFill>
           <a:ln/>
         </p:spPr>
-        <p:txBody>
-          <a:bodyPr/>
-          <a:lstStyle/>
-          <a:p>
-            <a:endParaRPr lang="en-US"/>
-          </a:p>
-        </p:txBody>
       </p:sp>
       <p:sp>
         <p:nvSpPr>
@@ -12312,13 +11810,6 @@
           </a:solidFill>
           <a:ln/>
         </p:spPr>
-        <p:txBody>
-          <a:bodyPr/>
-          <a:lstStyle/>
-          <a:p>
-            <a:endParaRPr lang="en-US"/>
-          </a:p>
-        </p:txBody>
       </p:sp>
       <p:sp>
         <p:nvSpPr>
@@ -12339,13 +11830,6 @@
           </a:solidFill>
           <a:ln/>
         </p:spPr>
-        <p:txBody>
-          <a:bodyPr/>
-          <a:lstStyle/>
-          <a:p>
-            <a:endParaRPr lang="en-US"/>
-          </a:p>
-        </p:txBody>
       </p:sp>
       <p:sp>
         <p:nvSpPr>
@@ -12366,13 +11850,6 @@
           </a:solidFill>
           <a:ln/>
         </p:spPr>
-        <p:txBody>
-          <a:bodyPr/>
-          <a:lstStyle/>
-          <a:p>
-            <a:endParaRPr lang="en-US"/>
-          </a:p>
-        </p:txBody>
       </p:sp>
       <p:sp>
         <p:nvSpPr>
@@ -12393,13 +11870,6 @@
           </a:solidFill>
           <a:ln/>
         </p:spPr>
-        <p:txBody>
-          <a:bodyPr/>
-          <a:lstStyle/>
-          <a:p>
-            <a:endParaRPr lang="en-US"/>
-          </a:p>
-        </p:txBody>
       </p:sp>
       <p:sp>
         <p:nvSpPr>
@@ -12420,13 +11890,6 @@
           </a:solidFill>
           <a:ln/>
         </p:spPr>
-        <p:txBody>
-          <a:bodyPr/>
-          <a:lstStyle/>
-          <a:p>
-            <a:endParaRPr lang="en-US"/>
-          </a:p>
-        </p:txBody>
       </p:sp>
       <p:sp>
         <p:nvSpPr>
@@ -12447,13 +11910,6 @@
           </a:solidFill>
           <a:ln/>
         </p:spPr>
-        <p:txBody>
-          <a:bodyPr/>
-          <a:lstStyle/>
-          <a:p>
-            <a:endParaRPr lang="en-US"/>
-          </a:p>
-        </p:txBody>
       </p:sp>
       <p:sp>
         <p:nvSpPr>
@@ -12474,13 +11930,6 @@
           </a:solidFill>
           <a:ln/>
         </p:spPr>
-        <p:txBody>
-          <a:bodyPr/>
-          <a:lstStyle/>
-          <a:p>
-            <a:endParaRPr lang="en-US"/>
-          </a:p>
-        </p:txBody>
       </p:sp>
       <p:sp>
         <p:nvSpPr>
@@ -12501,13 +11950,6 @@
           </a:solidFill>
           <a:ln/>
         </p:spPr>
-        <p:txBody>
-          <a:bodyPr/>
-          <a:lstStyle/>
-          <a:p>
-            <a:endParaRPr lang="en-US"/>
-          </a:p>
-        </p:txBody>
       </p:sp>
       <p:sp>
         <p:nvSpPr>
@@ -12528,13 +11970,6 @@
           </a:solidFill>
           <a:ln/>
         </p:spPr>
-        <p:txBody>
-          <a:bodyPr/>
-          <a:lstStyle/>
-          <a:p>
-            <a:endParaRPr lang="en-US"/>
-          </a:p>
-        </p:txBody>
       </p:sp>
       <p:sp>
         <p:nvSpPr>
@@ -12557,11 +11992,11 @@
           <a:bodyPr wrap="square" lIns="0" tIns="0" rIns="0" bIns="0" rtlCol="0" anchor="ctr"/>
           <a:lstStyle/>
           <a:p>
-            <a:pPr marL="0" indent="0" algn="l">
-              <a:buNone/>
-            </a:pPr>
-            <a:r>
-              <a:rPr lang="en-US" sz="1100" b="1" kern="0" spc="100" dirty="0">
+            <a:pPr algn="l" indent="0" marL="0">
+              <a:buNone/>
+            </a:pPr>
+            <a:r>
+              <a:rPr lang="en-US" sz="1100" b="1" spc="100" kern="0" dirty="0">
                 <a:solidFill>
                   <a:srgbClr val="A579F2"/>
                 </a:solidFill>
@@ -12571,8 +12006,11 @@
               </a:rPr>
               <a:t>STAGE 02  </a:t>
             </a:r>
-            <a:r>
-              <a:rPr lang="en-US" sz="1100" kern="0" spc="100" dirty="0">
+            <a:pPr algn="l" indent="0" marL="0">
+              <a:buNone/>
+            </a:pPr>
+            <a:r>
+              <a:rPr lang="en-US" sz="1100" spc="100" kern="0" dirty="0">
                 <a:solidFill>
                   <a:srgbClr val="99A2CC"/>
                 </a:solidFill>
@@ -12607,7 +12045,7 @@
           <a:bodyPr wrap="square" lIns="0" tIns="0" rIns="0" bIns="0" rtlCol="0" anchor="ctr"/>
           <a:lstStyle/>
           <a:p>
-            <a:pPr marL="0" indent="0">
+            <a:pPr indent="0" marL="0">
               <a:buNone/>
             </a:pPr>
             <a:r>
@@ -12643,7 +12081,7 @@
           <a:ln/>
         </p:spPr>
         <p:txBody>
-          <a:bodyPr wrap="square" lIns="0" tIns="0" rIns="0" bIns="0" rtlCol="0" anchor="ctr"/>
+          <a:bodyPr wrap="square" lIns="0" tIns="0" rIns="0" bIns="0" rtlCol="0" anchor="t"/>
           <a:lstStyle/>
           <a:p>
             <a:pPr marL="342900" indent="-342900">
@@ -12778,13 +12216,6 @@
             <a:prstDash val="solid"/>
           </a:ln>
         </p:spPr>
-        <p:txBody>
-          <a:bodyPr/>
-          <a:lstStyle/>
-          <a:p>
-            <a:endParaRPr lang="en-US"/>
-          </a:p>
-        </p:txBody>
       </p:sp>
       <p:sp>
         <p:nvSpPr>
@@ -12807,11 +12238,11 @@
           <a:bodyPr wrap="square" lIns="0" tIns="0" rIns="0" bIns="0" rtlCol="0" anchor="ctr"/>
           <a:lstStyle/>
           <a:p>
-            <a:pPr marL="0" indent="0">
-              <a:buNone/>
-            </a:pPr>
-            <a:r>
-              <a:rPr lang="en-US" sz="1050" kern="0" spc="100" dirty="0">
+            <a:pPr indent="0" marL="0">
+              <a:buNone/>
+            </a:pPr>
+            <a:r>
+              <a:rPr lang="en-US" sz="1050" spc="100" kern="0" dirty="0">
                 <a:solidFill>
                   <a:srgbClr val="A579F2"/>
                 </a:solidFill>
@@ -12847,13 +12278,6 @@
             <a:prstDash val="solid"/>
           </a:ln>
         </p:spPr>
-        <p:txBody>
-          <a:bodyPr/>
-          <a:lstStyle/>
-          <a:p>
-            <a:endParaRPr lang="en-US"/>
-          </a:p>
-        </p:txBody>
       </p:sp>
       <p:sp>
         <p:nvSpPr>
@@ -12873,10 +12297,10 @@
           <a:ln/>
         </p:spPr>
         <p:txBody>
-          <a:bodyPr wrap="square" lIns="0" tIns="0" rIns="0" bIns="0" rtlCol="0" anchor="ctr"/>
-          <a:lstStyle/>
-          <a:p>
-            <a:pPr marL="0" indent="0">
+          <a:bodyPr wrap="square" lIns="0" tIns="0" rIns="0" bIns="0" rtlCol="0" anchor="t"/>
+          <a:lstStyle/>
+          <a:p>
+            <a:pPr indent="0" marL="0">
               <a:lnSpc>
                 <a:spcPct val="112000"/>
               </a:lnSpc>
@@ -12896,7 +12320,7 @@
             <a:endParaRPr lang="en-US" sz="1050" dirty="0"/>
           </a:p>
           <a:p>
-            <a:pPr marL="0" indent="0">
+            <a:pPr indent="0" marL="0">
               <a:lnSpc>
                 <a:spcPct val="112000"/>
               </a:lnSpc>
@@ -12916,7 +12340,7 @@
             <a:endParaRPr lang="en-US" sz="1050" dirty="0"/>
           </a:p>
           <a:p>
-            <a:pPr marL="0" indent="0">
+            <a:pPr indent="0" marL="0">
               <a:lnSpc>
                 <a:spcPct val="112000"/>
               </a:lnSpc>
@@ -12936,7 +12360,7 @@
             <a:endParaRPr lang="en-US" sz="1050" dirty="0"/>
           </a:p>
           <a:p>
-            <a:pPr marL="0" indent="0">
+            <a:pPr indent="0" marL="0">
               <a:lnSpc>
                 <a:spcPct val="112000"/>
               </a:lnSpc>
@@ -12945,7 +12369,7 @@
             <a:endParaRPr lang="en-US" sz="1050" dirty="0"/>
           </a:p>
           <a:p>
-            <a:pPr marL="0" indent="0">
+            <a:pPr indent="0" marL="0">
               <a:lnSpc>
                 <a:spcPct val="112000"/>
               </a:lnSpc>
@@ -12965,7 +12389,7 @@
             <a:endParaRPr lang="en-US" sz="1050" dirty="0"/>
           </a:p>
           <a:p>
-            <a:pPr marL="0" indent="0">
+            <a:pPr indent="0" marL="0">
               <a:lnSpc>
                 <a:spcPct val="112000"/>
               </a:lnSpc>
@@ -12985,7 +12409,7 @@
             <a:endParaRPr lang="en-US" sz="1050" dirty="0"/>
           </a:p>
           <a:p>
-            <a:pPr marL="0" indent="0">
+            <a:pPr indent="0" marL="0">
               <a:lnSpc>
                 <a:spcPct val="112000"/>
               </a:lnSpc>
@@ -13005,7 +12429,7 @@
             <a:endParaRPr lang="en-US" sz="1050" dirty="0"/>
           </a:p>
           <a:p>
-            <a:pPr marL="0" indent="0">
+            <a:pPr indent="0" marL="0">
               <a:lnSpc>
                 <a:spcPct val="112000"/>
               </a:lnSpc>
@@ -13025,7 +12449,7 @@
             <a:endParaRPr lang="en-US" sz="1050" dirty="0"/>
           </a:p>
           <a:p>
-            <a:pPr marL="0" indent="0">
+            <a:pPr indent="0" marL="0">
               <a:lnSpc>
                 <a:spcPct val="112000"/>
               </a:lnSpc>
@@ -13045,7 +12469,7 @@
             <a:endParaRPr lang="en-US" sz="1050" dirty="0"/>
           </a:p>
           <a:p>
-            <a:pPr marL="0" indent="0">
+            <a:pPr indent="0" marL="0">
               <a:lnSpc>
                 <a:spcPct val="112000"/>
               </a:lnSpc>
@@ -13087,7 +12511,7 @@
           <a:bodyPr wrap="square" lIns="0" tIns="0" rIns="0" bIns="0" rtlCol="0" anchor="ctr"/>
           <a:lstStyle/>
           <a:p>
-            <a:pPr marL="0" indent="0" algn="l">
+            <a:pPr algn="l" indent="0" marL="0">
               <a:buNone/>
             </a:pPr>
             <a:r>
@@ -13126,7 +12550,7 @@
           <a:bodyPr wrap="square" lIns="0" tIns="0" rIns="0" bIns="0" rtlCol="0" anchor="ctr"/>
           <a:lstStyle/>
           <a:p>
-            <a:pPr marL="0" indent="0" algn="r">
+            <a:pPr algn="r" indent="0" marL="0">
               <a:buNone/>
             </a:pPr>
             <a:r>
@@ -13160,7 +12584,6 @@
         <a:solidFill>
           <a:srgbClr val="0E1330"/>
         </a:solidFill>
-        <a:effectLst/>
       </p:bgPr>
     </p:bg>
     <p:spTree>
@@ -13196,13 +12619,6 @@
           </a:solidFill>
           <a:ln/>
         </p:spPr>
-        <p:txBody>
-          <a:bodyPr/>
-          <a:lstStyle/>
-          <a:p>
-            <a:endParaRPr lang="en-US"/>
-          </a:p>
-        </p:txBody>
       </p:sp>
       <p:sp>
         <p:nvSpPr>
@@ -13223,13 +12639,6 @@
           </a:solidFill>
           <a:ln/>
         </p:spPr>
-        <p:txBody>
-          <a:bodyPr/>
-          <a:lstStyle/>
-          <a:p>
-            <a:endParaRPr lang="en-US"/>
-          </a:p>
-        </p:txBody>
       </p:sp>
       <p:sp>
         <p:nvSpPr>
@@ -13250,13 +12659,6 @@
           </a:solidFill>
           <a:ln/>
         </p:spPr>
-        <p:txBody>
-          <a:bodyPr/>
-          <a:lstStyle/>
-          <a:p>
-            <a:endParaRPr lang="en-US"/>
-          </a:p>
-        </p:txBody>
       </p:sp>
       <p:sp>
         <p:nvSpPr>
@@ -13277,13 +12679,6 @@
           </a:solidFill>
           <a:ln/>
         </p:spPr>
-        <p:txBody>
-          <a:bodyPr/>
-          <a:lstStyle/>
-          <a:p>
-            <a:endParaRPr lang="en-US"/>
-          </a:p>
-        </p:txBody>
       </p:sp>
       <p:sp>
         <p:nvSpPr>
@@ -13304,13 +12699,6 @@
           </a:solidFill>
           <a:ln/>
         </p:spPr>
-        <p:txBody>
-          <a:bodyPr/>
-          <a:lstStyle/>
-          <a:p>
-            <a:endParaRPr lang="en-US"/>
-          </a:p>
-        </p:txBody>
       </p:sp>
       <p:sp>
         <p:nvSpPr>
@@ -13331,13 +12719,6 @@
           </a:solidFill>
           <a:ln/>
         </p:spPr>
-        <p:txBody>
-          <a:bodyPr/>
-          <a:lstStyle/>
-          <a:p>
-            <a:endParaRPr lang="en-US"/>
-          </a:p>
-        </p:txBody>
       </p:sp>
       <p:sp>
         <p:nvSpPr>
@@ -13358,13 +12739,6 @@
           </a:solidFill>
           <a:ln/>
         </p:spPr>
-        <p:txBody>
-          <a:bodyPr/>
-          <a:lstStyle/>
-          <a:p>
-            <a:endParaRPr lang="en-US"/>
-          </a:p>
-        </p:txBody>
       </p:sp>
       <p:sp>
         <p:nvSpPr>
@@ -13385,13 +12759,6 @@
           </a:solidFill>
           <a:ln/>
         </p:spPr>
-        <p:txBody>
-          <a:bodyPr/>
-          <a:lstStyle/>
-          <a:p>
-            <a:endParaRPr lang="en-US"/>
-          </a:p>
-        </p:txBody>
       </p:sp>
       <p:sp>
         <p:nvSpPr>
@@ -13412,13 +12779,6 @@
           </a:solidFill>
           <a:ln/>
         </p:spPr>
-        <p:txBody>
-          <a:bodyPr/>
-          <a:lstStyle/>
-          <a:p>
-            <a:endParaRPr lang="en-US"/>
-          </a:p>
-        </p:txBody>
       </p:sp>
       <p:sp>
         <p:nvSpPr>
@@ -13439,13 +12799,6 @@
           </a:solidFill>
           <a:ln/>
         </p:spPr>
-        <p:txBody>
-          <a:bodyPr/>
-          <a:lstStyle/>
-          <a:p>
-            <a:endParaRPr lang="en-US"/>
-          </a:p>
-        </p:txBody>
       </p:sp>
       <p:sp>
         <p:nvSpPr>
@@ -13468,11 +12821,11 @@
           <a:bodyPr wrap="square" lIns="0" tIns="0" rIns="0" bIns="0" rtlCol="0" anchor="ctr"/>
           <a:lstStyle/>
           <a:p>
-            <a:pPr marL="0" indent="0" algn="l">
-              <a:buNone/>
-            </a:pPr>
-            <a:r>
-              <a:rPr lang="en-US" sz="1100" b="1" kern="0" spc="100" dirty="0">
+            <a:pPr algn="l" indent="0" marL="0">
+              <a:buNone/>
+            </a:pPr>
+            <a:r>
+              <a:rPr lang="en-US" sz="1100" b="1" spc="100" kern="0" dirty="0">
                 <a:solidFill>
                   <a:srgbClr val="A579F2"/>
                 </a:solidFill>
@@ -13482,8 +12835,11 @@
               </a:rPr>
               <a:t>STAGE 03  </a:t>
             </a:r>
-            <a:r>
-              <a:rPr lang="en-US" sz="1100" kern="0" spc="100" dirty="0">
+            <a:pPr algn="l" indent="0" marL="0">
+              <a:buNone/>
+            </a:pPr>
+            <a:r>
+              <a:rPr lang="en-US" sz="1100" spc="100" kern="0" dirty="0">
                 <a:solidFill>
                   <a:srgbClr val="99A2CC"/>
                 </a:solidFill>
@@ -13518,7 +12874,7 @@
           <a:bodyPr wrap="square" lIns="0" tIns="0" rIns="0" bIns="0" rtlCol="0" anchor="ctr"/>
           <a:lstStyle/>
           <a:p>
-            <a:pPr marL="0" indent="0">
+            <a:pPr indent="0" marL="0">
               <a:buNone/>
             </a:pPr>
             <a:r>
@@ -13554,7 +12910,7 @@
           <a:ln/>
         </p:spPr>
         <p:txBody>
-          <a:bodyPr wrap="square" lIns="0" tIns="0" rIns="0" bIns="0" rtlCol="0" anchor="ctr"/>
+          <a:bodyPr wrap="square" lIns="0" tIns="0" rIns="0" bIns="0" rtlCol="0" anchor="t"/>
           <a:lstStyle/>
           <a:p>
             <a:pPr marL="342900" indent="-342900">
@@ -13668,13 +13024,6 @@
             <a:prstDash val="solid"/>
           </a:ln>
         </p:spPr>
-        <p:txBody>
-          <a:bodyPr/>
-          <a:lstStyle/>
-          <a:p>
-            <a:endParaRPr lang="en-US"/>
-          </a:p>
-        </p:txBody>
       </p:sp>
       <p:sp>
         <p:nvSpPr>
@@ -13697,11 +13046,11 @@
           <a:bodyPr wrap="square" lIns="0" tIns="0" rIns="0" bIns="0" rtlCol="0" anchor="ctr"/>
           <a:lstStyle/>
           <a:p>
-            <a:pPr marL="0" indent="0">
-              <a:buNone/>
-            </a:pPr>
-            <a:r>
-              <a:rPr lang="en-US" sz="1050" kern="0" spc="100" dirty="0">
+            <a:pPr indent="0" marL="0">
+              <a:buNone/>
+            </a:pPr>
+            <a:r>
+              <a:rPr lang="en-US" sz="1050" spc="100" kern="0" dirty="0">
                 <a:solidFill>
                   <a:srgbClr val="A579F2"/>
                 </a:solidFill>
@@ -13737,13 +13086,6 @@
             <a:prstDash val="solid"/>
           </a:ln>
         </p:spPr>
-        <p:txBody>
-          <a:bodyPr/>
-          <a:lstStyle/>
-          <a:p>
-            <a:endParaRPr lang="en-US"/>
-          </a:p>
-        </p:txBody>
       </p:sp>
       <p:sp>
         <p:nvSpPr>
@@ -13763,10 +13105,10 @@
           <a:ln/>
         </p:spPr>
         <p:txBody>
-          <a:bodyPr wrap="square" lIns="0" tIns="0" rIns="0" bIns="0" rtlCol="0" anchor="ctr"/>
-          <a:lstStyle/>
-          <a:p>
-            <a:pPr marL="0" indent="0">
+          <a:bodyPr wrap="square" lIns="0" tIns="0" rIns="0" bIns="0" rtlCol="0" anchor="t"/>
+          <a:lstStyle/>
+          <a:p>
+            <a:pPr indent="0" marL="0">
               <a:lnSpc>
                 <a:spcPct val="112000"/>
               </a:lnSpc>
@@ -13786,7 +13128,7 @@
             <a:endParaRPr lang="en-US" sz="1000" dirty="0"/>
           </a:p>
           <a:p>
-            <a:pPr marL="0" indent="0">
+            <a:pPr indent="0" marL="0">
               <a:lnSpc>
                 <a:spcPct val="112000"/>
               </a:lnSpc>
@@ -13806,7 +13148,7 @@
             <a:endParaRPr lang="en-US" sz="1000" dirty="0"/>
           </a:p>
           <a:p>
-            <a:pPr marL="0" indent="0">
+            <a:pPr indent="0" marL="0">
               <a:lnSpc>
                 <a:spcPct val="112000"/>
               </a:lnSpc>
@@ -13826,7 +13168,7 @@
             <a:endParaRPr lang="en-US" sz="1000" dirty="0"/>
           </a:p>
           <a:p>
-            <a:pPr marL="0" indent="0">
+            <a:pPr indent="0" marL="0">
               <a:lnSpc>
                 <a:spcPct val="112000"/>
               </a:lnSpc>
@@ -13846,7 +13188,7 @@
             <a:endParaRPr lang="en-US" sz="1000" dirty="0"/>
           </a:p>
           <a:p>
-            <a:pPr marL="0" indent="0">
+            <a:pPr indent="0" marL="0">
               <a:lnSpc>
                 <a:spcPct val="112000"/>
               </a:lnSpc>
@@ -13866,7 +13208,7 @@
             <a:endParaRPr lang="en-US" sz="1000" dirty="0"/>
           </a:p>
           <a:p>
-            <a:pPr marL="0" indent="0">
+            <a:pPr indent="0" marL="0">
               <a:lnSpc>
                 <a:spcPct val="112000"/>
               </a:lnSpc>
@@ -13875,7 +13217,7 @@
             <a:endParaRPr lang="en-US" sz="1000" dirty="0"/>
           </a:p>
           <a:p>
-            <a:pPr marL="0" indent="0">
+            <a:pPr indent="0" marL="0">
               <a:lnSpc>
                 <a:spcPct val="112000"/>
               </a:lnSpc>
@@ -13895,7 +13237,7 @@
             <a:endParaRPr lang="en-US" sz="1000" dirty="0"/>
           </a:p>
           <a:p>
-            <a:pPr marL="0" indent="0">
+            <a:pPr indent="0" marL="0">
               <a:lnSpc>
                 <a:spcPct val="112000"/>
               </a:lnSpc>
@@ -13937,7 +13279,7 @@
           <a:bodyPr wrap="square" lIns="0" tIns="0" rIns="0" bIns="0" rtlCol="0" anchor="ctr"/>
           <a:lstStyle/>
           <a:p>
-            <a:pPr marL="0" indent="0" algn="l">
+            <a:pPr algn="l" indent="0" marL="0">
               <a:buNone/>
             </a:pPr>
             <a:r>
@@ -13976,7 +13318,7 @@
           <a:bodyPr wrap="square" lIns="0" tIns="0" rIns="0" bIns="0" rtlCol="0" anchor="ctr"/>
           <a:lstStyle/>
           <a:p>
-            <a:pPr marL="0" indent="0" algn="r">
+            <a:pPr algn="r" indent="0" marL="0">
               <a:buNone/>
             </a:pPr>
             <a:r>
@@ -14010,7 +13352,6 @@
         <a:solidFill>
           <a:srgbClr val="0E1330"/>
         </a:solidFill>
-        <a:effectLst/>
       </p:bgPr>
     </p:bg>
     <p:spTree>
@@ -14046,13 +13387,6 @@
           </a:solidFill>
           <a:ln/>
         </p:spPr>
-        <p:txBody>
-          <a:bodyPr/>
-          <a:lstStyle/>
-          <a:p>
-            <a:endParaRPr lang="en-US"/>
-          </a:p>
-        </p:txBody>
       </p:sp>
       <p:sp>
         <p:nvSpPr>
@@ -14073,13 +13407,6 @@
           </a:solidFill>
           <a:ln/>
         </p:spPr>
-        <p:txBody>
-          <a:bodyPr/>
-          <a:lstStyle/>
-          <a:p>
-            <a:endParaRPr lang="en-US"/>
-          </a:p>
-        </p:txBody>
       </p:sp>
       <p:sp>
         <p:nvSpPr>
@@ -14100,13 +13427,6 @@
           </a:solidFill>
           <a:ln/>
         </p:spPr>
-        <p:txBody>
-          <a:bodyPr/>
-          <a:lstStyle/>
-          <a:p>
-            <a:endParaRPr lang="en-US"/>
-          </a:p>
-        </p:txBody>
       </p:sp>
       <p:sp>
         <p:nvSpPr>
@@ -14127,13 +13447,6 @@
           </a:solidFill>
           <a:ln/>
         </p:spPr>
-        <p:txBody>
-          <a:bodyPr/>
-          <a:lstStyle/>
-          <a:p>
-            <a:endParaRPr lang="en-US"/>
-          </a:p>
-        </p:txBody>
       </p:sp>
       <p:sp>
         <p:nvSpPr>
@@ -14154,13 +13467,6 @@
           </a:solidFill>
           <a:ln/>
         </p:spPr>
-        <p:txBody>
-          <a:bodyPr/>
-          <a:lstStyle/>
-          <a:p>
-            <a:endParaRPr lang="en-US"/>
-          </a:p>
-        </p:txBody>
       </p:sp>
       <p:sp>
         <p:nvSpPr>
@@ -14181,13 +13487,6 @@
           </a:solidFill>
           <a:ln/>
         </p:spPr>
-        <p:txBody>
-          <a:bodyPr/>
-          <a:lstStyle/>
-          <a:p>
-            <a:endParaRPr lang="en-US"/>
-          </a:p>
-        </p:txBody>
       </p:sp>
       <p:sp>
         <p:nvSpPr>
@@ -14208,13 +13507,6 @@
           </a:solidFill>
           <a:ln/>
         </p:spPr>
-        <p:txBody>
-          <a:bodyPr/>
-          <a:lstStyle/>
-          <a:p>
-            <a:endParaRPr lang="en-US"/>
-          </a:p>
-        </p:txBody>
       </p:sp>
       <p:sp>
         <p:nvSpPr>
@@ -14235,13 +13527,6 @@
           </a:solidFill>
           <a:ln/>
         </p:spPr>
-        <p:txBody>
-          <a:bodyPr/>
-          <a:lstStyle/>
-          <a:p>
-            <a:endParaRPr lang="en-US"/>
-          </a:p>
-        </p:txBody>
       </p:sp>
       <p:sp>
         <p:nvSpPr>
@@ -14262,13 +13547,6 @@
           </a:solidFill>
           <a:ln/>
         </p:spPr>
-        <p:txBody>
-          <a:bodyPr/>
-          <a:lstStyle/>
-          <a:p>
-            <a:endParaRPr lang="en-US"/>
-          </a:p>
-        </p:txBody>
       </p:sp>
       <p:sp>
         <p:nvSpPr>
@@ -14289,13 +13567,6 @@
           </a:solidFill>
           <a:ln/>
         </p:spPr>
-        <p:txBody>
-          <a:bodyPr/>
-          <a:lstStyle/>
-          <a:p>
-            <a:endParaRPr lang="en-US"/>
-          </a:p>
-        </p:txBody>
       </p:sp>
       <p:sp>
         <p:nvSpPr>
@@ -14318,11 +13589,11 @@
           <a:bodyPr wrap="square" lIns="0" tIns="0" rIns="0" bIns="0" rtlCol="0" anchor="ctr"/>
           <a:lstStyle/>
           <a:p>
-            <a:pPr marL="0" indent="0" algn="l">
-              <a:buNone/>
-            </a:pPr>
-            <a:r>
-              <a:rPr lang="en-US" sz="1100" b="1" kern="0" spc="100" dirty="0">
+            <a:pPr algn="l" indent="0" marL="0">
+              <a:buNone/>
+            </a:pPr>
+            <a:r>
+              <a:rPr lang="en-US" sz="1100" b="1" spc="100" kern="0" dirty="0">
                 <a:solidFill>
                   <a:srgbClr val="A579F2"/>
                 </a:solidFill>
@@ -14332,8 +13603,11 @@
               </a:rPr>
               <a:t>STAGE 04  </a:t>
             </a:r>
-            <a:r>
-              <a:rPr lang="en-US" sz="1100" kern="0" spc="100" dirty="0">
+            <a:pPr algn="l" indent="0" marL="0">
+              <a:buNone/>
+            </a:pPr>
+            <a:r>
+              <a:rPr lang="en-US" sz="1100" spc="100" kern="0" dirty="0">
                 <a:solidFill>
                   <a:srgbClr val="99A2CC"/>
                 </a:solidFill>
@@ -14368,7 +13642,7 @@
           <a:bodyPr wrap="square" lIns="0" tIns="0" rIns="0" bIns="0" rtlCol="0" anchor="ctr"/>
           <a:lstStyle/>
           <a:p>
-            <a:pPr marL="0" indent="0">
+            <a:pPr indent="0" marL="0">
               <a:buNone/>
             </a:pPr>
             <a:r>
@@ -14404,7 +13678,7 @@
           <a:ln/>
         </p:spPr>
         <p:txBody>
-          <a:bodyPr wrap="square" lIns="0" tIns="0" rIns="0" bIns="0" rtlCol="0" anchor="ctr"/>
+          <a:bodyPr wrap="square" lIns="0" tIns="0" rIns="0" bIns="0" rtlCol="0" anchor="t"/>
           <a:lstStyle/>
           <a:p>
             <a:pPr marL="342900" indent="-342900">
@@ -14539,13 +13813,6 @@
             <a:prstDash val="solid"/>
           </a:ln>
         </p:spPr>
-        <p:txBody>
-          <a:bodyPr/>
-          <a:lstStyle/>
-          <a:p>
-            <a:endParaRPr lang="en-US"/>
-          </a:p>
-        </p:txBody>
       </p:sp>
       <p:sp>
         <p:nvSpPr>
@@ -14568,11 +13835,11 @@
           <a:bodyPr wrap="square" lIns="0" tIns="0" rIns="0" bIns="0" rtlCol="0" anchor="ctr"/>
           <a:lstStyle/>
           <a:p>
-            <a:pPr marL="0" indent="0">
-              <a:buNone/>
-            </a:pPr>
-            <a:r>
-              <a:rPr lang="en-US" sz="1050" kern="0" spc="100" dirty="0">
+            <a:pPr indent="0" marL="0">
+              <a:buNone/>
+            </a:pPr>
+            <a:r>
+              <a:rPr lang="en-US" sz="1050" spc="100" kern="0" dirty="0">
                 <a:solidFill>
                   <a:srgbClr val="A579F2"/>
                 </a:solidFill>
@@ -14608,13 +13875,6 @@
             <a:prstDash val="solid"/>
           </a:ln>
         </p:spPr>
-        <p:txBody>
-          <a:bodyPr/>
-          <a:lstStyle/>
-          <a:p>
-            <a:endParaRPr lang="en-US"/>
-          </a:p>
-        </p:txBody>
       </p:sp>
       <p:sp>
         <p:nvSpPr>
@@ -14634,10 +13894,10 @@
           <a:ln/>
         </p:spPr>
         <p:txBody>
-          <a:bodyPr wrap="square" lIns="0" tIns="0" rIns="0" bIns="0" rtlCol="0" anchor="ctr"/>
-          <a:lstStyle/>
-          <a:p>
-            <a:pPr marL="0" indent="0">
+          <a:bodyPr wrap="square" lIns="0" tIns="0" rIns="0" bIns="0" rtlCol="0" anchor="t"/>
+          <a:lstStyle/>
+          <a:p>
+            <a:pPr indent="0" marL="0">
               <a:lnSpc>
                 <a:spcPct val="112000"/>
               </a:lnSpc>
@@ -14657,7 +13917,7 @@
             <a:endParaRPr lang="en-US" sz="1000" dirty="0"/>
           </a:p>
           <a:p>
-            <a:pPr marL="0" indent="0">
+            <a:pPr indent="0" marL="0">
               <a:lnSpc>
                 <a:spcPct val="112000"/>
               </a:lnSpc>
@@ -14677,7 +13937,7 @@
             <a:endParaRPr lang="en-US" sz="1000" dirty="0"/>
           </a:p>
           <a:p>
-            <a:pPr marL="0" indent="0">
+            <a:pPr indent="0" marL="0">
               <a:lnSpc>
                 <a:spcPct val="112000"/>
               </a:lnSpc>
@@ -14697,7 +13957,7 @@
             <a:endParaRPr lang="en-US" sz="1000" dirty="0"/>
           </a:p>
           <a:p>
-            <a:pPr marL="0" indent="0">
+            <a:pPr indent="0" marL="0">
               <a:lnSpc>
                 <a:spcPct val="112000"/>
               </a:lnSpc>
@@ -14717,7 +13977,7 @@
             <a:endParaRPr lang="en-US" sz="1000" dirty="0"/>
           </a:p>
           <a:p>
-            <a:pPr marL="0" indent="0">
+            <a:pPr indent="0" marL="0">
               <a:lnSpc>
                 <a:spcPct val="112000"/>
               </a:lnSpc>
@@ -14737,7 +13997,7 @@
             <a:endParaRPr lang="en-US" sz="1000" dirty="0"/>
           </a:p>
           <a:p>
-            <a:pPr marL="0" indent="0">
+            <a:pPr indent="0" marL="0">
               <a:lnSpc>
                 <a:spcPct val="112000"/>
               </a:lnSpc>
@@ -14757,7 +14017,7 @@
             <a:endParaRPr lang="en-US" sz="1000" dirty="0"/>
           </a:p>
           <a:p>
-            <a:pPr marL="0" indent="0">
+            <a:pPr indent="0" marL="0">
               <a:lnSpc>
                 <a:spcPct val="112000"/>
               </a:lnSpc>
@@ -14777,7 +14037,7 @@
             <a:endParaRPr lang="en-US" sz="1000" dirty="0"/>
           </a:p>
           <a:p>
-            <a:pPr marL="0" indent="0">
+            <a:pPr indent="0" marL="0">
               <a:lnSpc>
                 <a:spcPct val="112000"/>
               </a:lnSpc>
@@ -14797,7 +14057,7 @@
             <a:endParaRPr lang="en-US" sz="1000" dirty="0"/>
           </a:p>
           <a:p>
-            <a:pPr marL="0" indent="0">
+            <a:pPr indent="0" marL="0">
               <a:lnSpc>
                 <a:spcPct val="112000"/>
               </a:lnSpc>
@@ -14817,7 +14077,7 @@
             <a:endParaRPr lang="en-US" sz="1000" dirty="0"/>
           </a:p>
           <a:p>
-            <a:pPr marL="0" indent="0">
+            <a:pPr indent="0" marL="0">
               <a:lnSpc>
                 <a:spcPct val="112000"/>
               </a:lnSpc>
@@ -14859,7 +14119,7 @@
           <a:bodyPr wrap="square" lIns="0" tIns="0" rIns="0" bIns="0" rtlCol="0" anchor="ctr"/>
           <a:lstStyle/>
           <a:p>
-            <a:pPr marL="0" indent="0" algn="l">
+            <a:pPr algn="l" indent="0" marL="0">
               <a:buNone/>
             </a:pPr>
             <a:r>
@@ -14898,7 +14158,7 @@
           <a:bodyPr wrap="square" lIns="0" tIns="0" rIns="0" bIns="0" rtlCol="0" anchor="ctr"/>
           <a:lstStyle/>
           <a:p>
-            <a:pPr marL="0" indent="0" algn="r">
+            <a:pPr algn="r" indent="0" marL="0">
               <a:buNone/>
             </a:pPr>
             <a:r>
@@ -14932,7 +14192,6 @@
         <a:solidFill>
           <a:srgbClr val="0E1330"/>
         </a:solidFill>
-        <a:effectLst/>
       </p:bgPr>
     </p:bg>
     <p:spTree>
@@ -14968,13 +14227,6 @@
           </a:solidFill>
           <a:ln/>
         </p:spPr>
-        <p:txBody>
-          <a:bodyPr/>
-          <a:lstStyle/>
-          <a:p>
-            <a:endParaRPr lang="en-US"/>
-          </a:p>
-        </p:txBody>
       </p:sp>
       <p:sp>
         <p:nvSpPr>
@@ -14995,13 +14247,6 @@
           </a:solidFill>
           <a:ln/>
         </p:spPr>
-        <p:txBody>
-          <a:bodyPr/>
-          <a:lstStyle/>
-          <a:p>
-            <a:endParaRPr lang="en-US"/>
-          </a:p>
-        </p:txBody>
       </p:sp>
       <p:sp>
         <p:nvSpPr>
@@ -15022,13 +14267,6 @@
           </a:solidFill>
           <a:ln/>
         </p:spPr>
-        <p:txBody>
-          <a:bodyPr/>
-          <a:lstStyle/>
-          <a:p>
-            <a:endParaRPr lang="en-US"/>
-          </a:p>
-        </p:txBody>
       </p:sp>
       <p:sp>
         <p:nvSpPr>
@@ -15049,13 +14287,6 @@
           </a:solidFill>
           <a:ln/>
         </p:spPr>
-        <p:txBody>
-          <a:bodyPr/>
-          <a:lstStyle/>
-          <a:p>
-            <a:endParaRPr lang="en-US"/>
-          </a:p>
-        </p:txBody>
       </p:sp>
       <p:sp>
         <p:nvSpPr>
@@ -15076,13 +14307,6 @@
           </a:solidFill>
           <a:ln/>
         </p:spPr>
-        <p:txBody>
-          <a:bodyPr/>
-          <a:lstStyle/>
-          <a:p>
-            <a:endParaRPr lang="en-US"/>
-          </a:p>
-        </p:txBody>
       </p:sp>
       <p:sp>
         <p:nvSpPr>
@@ -15103,13 +14327,6 @@
           </a:solidFill>
           <a:ln/>
         </p:spPr>
-        <p:txBody>
-          <a:bodyPr/>
-          <a:lstStyle/>
-          <a:p>
-            <a:endParaRPr lang="en-US"/>
-          </a:p>
-        </p:txBody>
       </p:sp>
       <p:sp>
         <p:nvSpPr>
@@ -15130,13 +14347,6 @@
           </a:solidFill>
           <a:ln/>
         </p:spPr>
-        <p:txBody>
-          <a:bodyPr/>
-          <a:lstStyle/>
-          <a:p>
-            <a:endParaRPr lang="en-US"/>
-          </a:p>
-        </p:txBody>
       </p:sp>
       <p:sp>
         <p:nvSpPr>
@@ -15157,13 +14367,6 @@
           </a:solidFill>
           <a:ln/>
         </p:spPr>
-        <p:txBody>
-          <a:bodyPr/>
-          <a:lstStyle/>
-          <a:p>
-            <a:endParaRPr lang="en-US"/>
-          </a:p>
-        </p:txBody>
       </p:sp>
       <p:sp>
         <p:nvSpPr>
@@ -15184,13 +14387,6 @@
           </a:solidFill>
           <a:ln/>
         </p:spPr>
-        <p:txBody>
-          <a:bodyPr/>
-          <a:lstStyle/>
-          <a:p>
-            <a:endParaRPr lang="en-US"/>
-          </a:p>
-        </p:txBody>
       </p:sp>
       <p:sp>
         <p:nvSpPr>
@@ -15211,13 +14407,6 @@
           </a:solidFill>
           <a:ln/>
         </p:spPr>
-        <p:txBody>
-          <a:bodyPr/>
-          <a:lstStyle/>
-          <a:p>
-            <a:endParaRPr lang="en-US"/>
-          </a:p>
-        </p:txBody>
       </p:sp>
       <p:sp>
         <p:nvSpPr>
@@ -15240,11 +14429,11 @@
           <a:bodyPr wrap="square" lIns="0" tIns="0" rIns="0" bIns="0" rtlCol="0" anchor="ctr"/>
           <a:lstStyle/>
           <a:p>
-            <a:pPr marL="0" indent="0" algn="l">
-              <a:buNone/>
-            </a:pPr>
-            <a:r>
-              <a:rPr lang="en-US" sz="1100" b="1" kern="0" spc="100" dirty="0">
+            <a:pPr algn="l" indent="0" marL="0">
+              <a:buNone/>
+            </a:pPr>
+            <a:r>
+              <a:rPr lang="en-US" sz="1100" b="1" spc="100" kern="0" dirty="0">
                 <a:solidFill>
                   <a:srgbClr val="2FD1C0"/>
                 </a:solidFill>
@@ -15254,8 +14443,11 @@
               </a:rPr>
               <a:t>STAGE 05  </a:t>
             </a:r>
-            <a:r>
-              <a:rPr lang="en-US" sz="1100" kern="0" spc="100" dirty="0">
+            <a:pPr algn="l" indent="0" marL="0">
+              <a:buNone/>
+            </a:pPr>
+            <a:r>
+              <a:rPr lang="en-US" sz="1100" spc="100" kern="0" dirty="0">
                 <a:solidFill>
                   <a:srgbClr val="99A2CC"/>
                 </a:solidFill>
@@ -15290,7 +14482,7 @@
           <a:bodyPr wrap="square" lIns="0" tIns="0" rIns="0" bIns="0" rtlCol="0" anchor="ctr"/>
           <a:lstStyle/>
           <a:p>
-            <a:pPr marL="0" indent="0">
+            <a:pPr indent="0" marL="0">
               <a:buNone/>
             </a:pPr>
             <a:r>
@@ -15326,7 +14518,7 @@
           <a:ln/>
         </p:spPr>
         <p:txBody>
-          <a:bodyPr wrap="square" lIns="0" tIns="0" rIns="0" bIns="0" rtlCol="0" anchor="ctr"/>
+          <a:bodyPr wrap="square" lIns="0" tIns="0" rIns="0" bIns="0" rtlCol="0" anchor="t"/>
           <a:lstStyle/>
           <a:p>
             <a:pPr marL="342900" indent="-342900">
@@ -15440,13 +14632,6 @@
             <a:prstDash val="solid"/>
           </a:ln>
         </p:spPr>
-        <p:txBody>
-          <a:bodyPr/>
-          <a:lstStyle/>
-          <a:p>
-            <a:endParaRPr lang="en-US"/>
-          </a:p>
-        </p:txBody>
       </p:sp>
       <p:sp>
         <p:nvSpPr>
@@ -15469,11 +14654,11 @@
           <a:bodyPr wrap="square" lIns="0" tIns="0" rIns="0" bIns="0" rtlCol="0" anchor="ctr"/>
           <a:lstStyle/>
           <a:p>
-            <a:pPr marL="0" indent="0">
-              <a:buNone/>
-            </a:pPr>
-            <a:r>
-              <a:rPr lang="en-US" sz="1050" kern="0" spc="100" dirty="0">
+            <a:pPr indent="0" marL="0">
+              <a:buNone/>
+            </a:pPr>
+            <a:r>
+              <a:rPr lang="en-US" sz="1050" spc="100" kern="0" dirty="0">
                 <a:solidFill>
                   <a:srgbClr val="2FD1C0"/>
                 </a:solidFill>
@@ -15509,13 +14694,6 @@
             <a:prstDash val="solid"/>
           </a:ln>
         </p:spPr>
-        <p:txBody>
-          <a:bodyPr/>
-          <a:lstStyle/>
-          <a:p>
-            <a:endParaRPr lang="en-US"/>
-          </a:p>
-        </p:txBody>
       </p:sp>
       <p:sp>
         <p:nvSpPr>
@@ -15535,10 +14713,10 @@
           <a:ln/>
         </p:spPr>
         <p:txBody>
-          <a:bodyPr wrap="square" lIns="0" tIns="0" rIns="0" bIns="0" rtlCol="0" anchor="ctr"/>
-          <a:lstStyle/>
-          <a:p>
-            <a:pPr marL="0" indent="0">
+          <a:bodyPr wrap="square" lIns="0" tIns="0" rIns="0" bIns="0" rtlCol="0" anchor="t"/>
+          <a:lstStyle/>
+          <a:p>
+            <a:pPr indent="0" marL="0">
               <a:lnSpc>
                 <a:spcPct val="112000"/>
               </a:lnSpc>
@@ -15558,7 +14736,7 @@
             <a:endParaRPr lang="en-US" sz="1000" dirty="0"/>
           </a:p>
           <a:p>
-            <a:pPr marL="0" indent="0">
+            <a:pPr indent="0" marL="0">
               <a:lnSpc>
                 <a:spcPct val="112000"/>
               </a:lnSpc>
@@ -15578,7 +14756,7 @@
             <a:endParaRPr lang="en-US" sz="1000" dirty="0"/>
           </a:p>
           <a:p>
-            <a:pPr marL="0" indent="0">
+            <a:pPr indent="0" marL="0">
               <a:lnSpc>
                 <a:spcPct val="112000"/>
               </a:lnSpc>
@@ -15598,7 +14776,7 @@
             <a:endParaRPr lang="en-US" sz="1000" dirty="0"/>
           </a:p>
           <a:p>
-            <a:pPr marL="0" indent="0">
+            <a:pPr indent="0" marL="0">
               <a:lnSpc>
                 <a:spcPct val="112000"/>
               </a:lnSpc>
@@ -15607,7 +14785,7 @@
             <a:endParaRPr lang="en-US" sz="1000" dirty="0"/>
           </a:p>
           <a:p>
-            <a:pPr marL="0" indent="0">
+            <a:pPr indent="0" marL="0">
               <a:lnSpc>
                 <a:spcPct val="112000"/>
               </a:lnSpc>
@@ -15627,7 +14805,7 @@
             <a:endParaRPr lang="en-US" sz="1000" dirty="0"/>
           </a:p>
           <a:p>
-            <a:pPr marL="0" indent="0">
+            <a:pPr indent="0" marL="0">
               <a:lnSpc>
                 <a:spcPct val="112000"/>
               </a:lnSpc>
@@ -15647,7 +14825,7 @@
             <a:endParaRPr lang="en-US" sz="1000" dirty="0"/>
           </a:p>
           <a:p>
-            <a:pPr marL="0" indent="0">
+            <a:pPr indent="0" marL="0">
               <a:lnSpc>
                 <a:spcPct val="112000"/>
               </a:lnSpc>
@@ -15667,7 +14845,7 @@
             <a:endParaRPr lang="en-US" sz="1000" dirty="0"/>
           </a:p>
           <a:p>
-            <a:pPr marL="0" indent="0">
+            <a:pPr indent="0" marL="0">
               <a:lnSpc>
                 <a:spcPct val="112000"/>
               </a:lnSpc>
@@ -15687,7 +14865,7 @@
             <a:endParaRPr lang="en-US" sz="1000" dirty="0"/>
           </a:p>
           <a:p>
-            <a:pPr marL="0" indent="0">
+            <a:pPr indent="0" marL="0">
               <a:lnSpc>
                 <a:spcPct val="112000"/>
               </a:lnSpc>
@@ -15707,7 +14885,7 @@
             <a:endParaRPr lang="en-US" sz="1000" dirty="0"/>
           </a:p>
           <a:p>
-            <a:pPr marL="0" indent="0">
+            <a:pPr indent="0" marL="0">
               <a:lnSpc>
                 <a:spcPct val="112000"/>
               </a:lnSpc>
@@ -15749,7 +14927,7 @@
           <a:bodyPr wrap="square" lIns="0" tIns="0" rIns="0" bIns="0" rtlCol="0" anchor="ctr"/>
           <a:lstStyle/>
           <a:p>
-            <a:pPr marL="0" indent="0" algn="l">
+            <a:pPr algn="l" indent="0" marL="0">
               <a:buNone/>
             </a:pPr>
             <a:r>
@@ -15788,7 +14966,7 @@
           <a:bodyPr wrap="square" lIns="0" tIns="0" rIns="0" bIns="0" rtlCol="0" anchor="ctr"/>
           <a:lstStyle/>
           <a:p>
-            <a:pPr marL="0" indent="0" algn="r">
+            <a:pPr algn="r" indent="0" marL="0">
               <a:buNone/>
             </a:pPr>
             <a:r>
@@ -15822,7 +15000,6 @@
         <a:solidFill>
           <a:srgbClr val="0E1330"/>
         </a:solidFill>
-        <a:effectLst/>
       </p:bgPr>
     </p:bg>
     <p:spTree>
@@ -15858,13 +15035,6 @@
           </a:solidFill>
           <a:ln/>
         </p:spPr>
-        <p:txBody>
-          <a:bodyPr/>
-          <a:lstStyle/>
-          <a:p>
-            <a:endParaRPr lang="en-US"/>
-          </a:p>
-        </p:txBody>
       </p:sp>
       <p:sp>
         <p:nvSpPr>
@@ -15885,13 +15055,6 @@
           </a:solidFill>
           <a:ln/>
         </p:spPr>
-        <p:txBody>
-          <a:bodyPr/>
-          <a:lstStyle/>
-          <a:p>
-            <a:endParaRPr lang="en-US"/>
-          </a:p>
-        </p:txBody>
       </p:sp>
       <p:sp>
         <p:nvSpPr>
@@ -15912,13 +15075,6 @@
           </a:solidFill>
           <a:ln/>
         </p:spPr>
-        <p:txBody>
-          <a:bodyPr/>
-          <a:lstStyle/>
-          <a:p>
-            <a:endParaRPr lang="en-US"/>
-          </a:p>
-        </p:txBody>
       </p:sp>
       <p:sp>
         <p:nvSpPr>
@@ -15939,13 +15095,6 @@
           </a:solidFill>
           <a:ln/>
         </p:spPr>
-        <p:txBody>
-          <a:bodyPr/>
-          <a:lstStyle/>
-          <a:p>
-            <a:endParaRPr lang="en-US"/>
-          </a:p>
-        </p:txBody>
       </p:sp>
       <p:sp>
         <p:nvSpPr>
@@ -15966,13 +15115,6 @@
           </a:solidFill>
           <a:ln/>
         </p:spPr>
-        <p:txBody>
-          <a:bodyPr/>
-          <a:lstStyle/>
-          <a:p>
-            <a:endParaRPr lang="en-US"/>
-          </a:p>
-        </p:txBody>
       </p:sp>
       <p:sp>
         <p:nvSpPr>
@@ -15993,13 +15135,6 @@
           </a:solidFill>
           <a:ln/>
         </p:spPr>
-        <p:txBody>
-          <a:bodyPr/>
-          <a:lstStyle/>
-          <a:p>
-            <a:endParaRPr lang="en-US"/>
-          </a:p>
-        </p:txBody>
       </p:sp>
       <p:sp>
         <p:nvSpPr>
@@ -16020,13 +15155,6 @@
           </a:solidFill>
           <a:ln/>
         </p:spPr>
-        <p:txBody>
-          <a:bodyPr/>
-          <a:lstStyle/>
-          <a:p>
-            <a:endParaRPr lang="en-US"/>
-          </a:p>
-        </p:txBody>
       </p:sp>
       <p:sp>
         <p:nvSpPr>
@@ -16047,13 +15175,6 @@
           </a:solidFill>
           <a:ln/>
         </p:spPr>
-        <p:txBody>
-          <a:bodyPr/>
-          <a:lstStyle/>
-          <a:p>
-            <a:endParaRPr lang="en-US"/>
-          </a:p>
-        </p:txBody>
       </p:sp>
       <p:sp>
         <p:nvSpPr>
@@ -16074,13 +15195,6 @@
           </a:solidFill>
           <a:ln/>
         </p:spPr>
-        <p:txBody>
-          <a:bodyPr/>
-          <a:lstStyle/>
-          <a:p>
-            <a:endParaRPr lang="en-US"/>
-          </a:p>
-        </p:txBody>
       </p:sp>
       <p:sp>
         <p:nvSpPr>
@@ -16101,13 +15215,6 @@
           </a:solidFill>
           <a:ln/>
         </p:spPr>
-        <p:txBody>
-          <a:bodyPr/>
-          <a:lstStyle/>
-          <a:p>
-            <a:endParaRPr lang="en-US"/>
-          </a:p>
-        </p:txBody>
       </p:sp>
       <p:sp>
         <p:nvSpPr>
@@ -16130,11 +15237,11 @@
           <a:bodyPr wrap="square" lIns="0" tIns="0" rIns="0" bIns="0" rtlCol="0" anchor="ctr"/>
           <a:lstStyle/>
           <a:p>
-            <a:pPr marL="0" indent="0" algn="l">
-              <a:buNone/>
-            </a:pPr>
-            <a:r>
-              <a:rPr lang="en-US" sz="1100" b="1" kern="0" spc="100" dirty="0">
+            <a:pPr algn="l" indent="0" marL="0">
+              <a:buNone/>
+            </a:pPr>
+            <a:r>
+              <a:rPr lang="en-US" sz="1100" b="1" spc="100" kern="0" dirty="0">
                 <a:solidFill>
                   <a:srgbClr val="2FD1C0"/>
                 </a:solidFill>
@@ -16144,8 +15251,11 @@
               </a:rPr>
               <a:t>STAGE 06  </a:t>
             </a:r>
-            <a:r>
-              <a:rPr lang="en-US" sz="1100" kern="0" spc="100" dirty="0">
+            <a:pPr algn="l" indent="0" marL="0">
+              <a:buNone/>
+            </a:pPr>
+            <a:r>
+              <a:rPr lang="en-US" sz="1100" spc="100" kern="0" dirty="0">
                 <a:solidFill>
                   <a:srgbClr val="99A2CC"/>
                 </a:solidFill>
@@ -16180,7 +15290,7 @@
           <a:bodyPr wrap="square" lIns="0" tIns="0" rIns="0" bIns="0" rtlCol="0" anchor="ctr"/>
           <a:lstStyle/>
           <a:p>
-            <a:pPr marL="0" indent="0">
+            <a:pPr indent="0" marL="0">
               <a:buNone/>
             </a:pPr>
             <a:r>
@@ -16216,7 +15326,7 @@
           <a:ln/>
         </p:spPr>
         <p:txBody>
-          <a:bodyPr wrap="square" lIns="0" tIns="0" rIns="0" bIns="0" rtlCol="0" anchor="ctr"/>
+          <a:bodyPr wrap="square" lIns="0" tIns="0" rIns="0" bIns="0" rtlCol="0" anchor="t"/>
           <a:lstStyle/>
           <a:p>
             <a:pPr marL="342900" indent="-342900">
@@ -16330,13 +15440,6 @@
             <a:prstDash val="solid"/>
           </a:ln>
         </p:spPr>
-        <p:txBody>
-          <a:bodyPr/>
-          <a:lstStyle/>
-          <a:p>
-            <a:endParaRPr lang="en-US"/>
-          </a:p>
-        </p:txBody>
       </p:sp>
       <p:sp>
         <p:nvSpPr>
@@ -16359,11 +15462,11 @@
           <a:bodyPr wrap="square" lIns="0" tIns="0" rIns="0" bIns="0" rtlCol="0" anchor="ctr"/>
           <a:lstStyle/>
           <a:p>
-            <a:pPr marL="0" indent="0">
-              <a:buNone/>
-            </a:pPr>
-            <a:r>
-              <a:rPr lang="en-US" sz="1050" kern="0" spc="100" dirty="0">
+            <a:pPr indent="0" marL="0">
+              <a:buNone/>
+            </a:pPr>
+            <a:r>
+              <a:rPr lang="en-US" sz="1050" spc="100" kern="0" dirty="0">
                 <a:solidFill>
                   <a:srgbClr val="2FD1C0"/>
                 </a:solidFill>
@@ -16399,13 +15502,6 @@
             <a:prstDash val="solid"/>
           </a:ln>
         </p:spPr>
-        <p:txBody>
-          <a:bodyPr/>
-          <a:lstStyle/>
-          <a:p>
-            <a:endParaRPr lang="en-US"/>
-          </a:p>
-        </p:txBody>
       </p:sp>
       <p:sp>
         <p:nvSpPr>
@@ -16425,10 +15521,10 @@
           <a:ln/>
         </p:spPr>
         <p:txBody>
-          <a:bodyPr wrap="square" lIns="0" tIns="0" rIns="0" bIns="0" rtlCol="0" anchor="ctr"/>
-          <a:lstStyle/>
-          <a:p>
-            <a:pPr marL="0" indent="0">
+          <a:bodyPr wrap="square" lIns="0" tIns="0" rIns="0" bIns="0" rtlCol="0" anchor="t"/>
+          <a:lstStyle/>
+          <a:p>
+            <a:pPr indent="0" marL="0">
               <a:lnSpc>
                 <a:spcPct val="112000"/>
               </a:lnSpc>
@@ -16448,7 +15544,7 @@
             <a:endParaRPr lang="en-US" sz="1000" dirty="0"/>
           </a:p>
           <a:p>
-            <a:pPr marL="0" indent="0">
+            <a:pPr indent="0" marL="0">
               <a:lnSpc>
                 <a:spcPct val="112000"/>
               </a:lnSpc>
@@ -16468,7 +15564,7 @@
             <a:endParaRPr lang="en-US" sz="1000" dirty="0"/>
           </a:p>
           <a:p>
-            <a:pPr marL="0" indent="0">
+            <a:pPr indent="0" marL="0">
               <a:lnSpc>
                 <a:spcPct val="112000"/>
               </a:lnSpc>
@@ -16488,7 +15584,7 @@
             <a:endParaRPr lang="en-US" sz="1000" dirty="0"/>
           </a:p>
           <a:p>
-            <a:pPr marL="0" indent="0">
+            <a:pPr indent="0" marL="0">
               <a:lnSpc>
                 <a:spcPct val="112000"/>
               </a:lnSpc>
@@ -16508,7 +15604,7 @@
             <a:endParaRPr lang="en-US" sz="1000" dirty="0"/>
           </a:p>
           <a:p>
-            <a:pPr marL="0" indent="0">
+            <a:pPr indent="0" marL="0">
               <a:lnSpc>
                 <a:spcPct val="112000"/>
               </a:lnSpc>
@@ -16517,7 +15613,7 @@
             <a:endParaRPr lang="en-US" sz="1000" dirty="0"/>
           </a:p>
           <a:p>
-            <a:pPr marL="0" indent="0">
+            <a:pPr indent="0" marL="0">
               <a:lnSpc>
                 <a:spcPct val="112000"/>
               </a:lnSpc>
@@ -16537,7 +15633,7 @@
             <a:endParaRPr lang="en-US" sz="1000" dirty="0"/>
           </a:p>
           <a:p>
-            <a:pPr marL="0" indent="0">
+            <a:pPr indent="0" marL="0">
               <a:lnSpc>
                 <a:spcPct val="112000"/>
               </a:lnSpc>
@@ -16557,7 +15653,7 @@
             <a:endParaRPr lang="en-US" sz="1000" dirty="0"/>
           </a:p>
           <a:p>
-            <a:pPr marL="0" indent="0">
+            <a:pPr indent="0" marL="0">
               <a:lnSpc>
                 <a:spcPct val="112000"/>
               </a:lnSpc>
@@ -16577,7 +15673,7 @@
             <a:endParaRPr lang="en-US" sz="1000" dirty="0"/>
           </a:p>
           <a:p>
-            <a:pPr marL="0" indent="0">
+            <a:pPr indent="0" marL="0">
               <a:lnSpc>
                 <a:spcPct val="112000"/>
               </a:lnSpc>
@@ -16586,7 +15682,7 @@
             <a:endParaRPr lang="en-US" sz="1000" dirty="0"/>
           </a:p>
           <a:p>
-            <a:pPr marL="0" indent="0">
+            <a:pPr indent="0" marL="0">
               <a:lnSpc>
                 <a:spcPct val="112000"/>
               </a:lnSpc>
@@ -16628,7 +15724,7 @@
           <a:bodyPr wrap="square" lIns="0" tIns="0" rIns="0" bIns="0" rtlCol="0" anchor="ctr"/>
           <a:lstStyle/>
           <a:p>
-            <a:pPr marL="0" indent="0" algn="l">
+            <a:pPr algn="l" indent="0" marL="0">
               <a:buNone/>
             </a:pPr>
             <a:r>
@@ -16667,7 +15763,7 @@
           <a:bodyPr wrap="square" lIns="0" tIns="0" rIns="0" bIns="0" rtlCol="0" anchor="ctr"/>
           <a:lstStyle/>
           <a:p>
-            <a:pPr marL="0" indent="0" algn="r">
+            <a:pPr algn="r" indent="0" marL="0">
               <a:buNone/>
             </a:pPr>
             <a:r>
@@ -16986,319 +16082,4 @@
     </a:ext>
   </a:extLst>
 </a:theme>
-</file>
-
-<file path=ppt/theme/theme2.xml><?xml version="1.0" encoding="utf-8"?>
-<a:theme xmlns:a="http://schemas.openxmlformats.org/drawingml/2006/main" name="Office Theme">
-  <a:themeElements>
-    <a:clrScheme name="Office">
-      <a:dk1>
-        <a:sysClr val="windowText" lastClr="000000"/>
-      </a:dk1>
-      <a:lt1>
-        <a:sysClr val="window" lastClr="FFFFFF"/>
-      </a:lt1>
-      <a:dk2>
-        <a:srgbClr val="0E2841"/>
-      </a:dk2>
-      <a:lt2>
-        <a:srgbClr val="E8E8E8"/>
-      </a:lt2>
-      <a:accent1>
-        <a:srgbClr val="156082"/>
-      </a:accent1>
-      <a:accent2>
-        <a:srgbClr val="E97132"/>
-      </a:accent2>
-      <a:accent3>
-        <a:srgbClr val="196B24"/>
-      </a:accent3>
-      <a:accent4>
-        <a:srgbClr val="0F9ED5"/>
-      </a:accent4>
-      <a:accent5>
-        <a:srgbClr val="A02B93"/>
-      </a:accent5>
-      <a:accent6>
-        <a:srgbClr val="4EA72E"/>
-      </a:accent6>
-      <a:hlink>
-        <a:srgbClr val="467886"/>
-      </a:hlink>
-      <a:folHlink>
-        <a:srgbClr val="96607D"/>
-      </a:folHlink>
-    </a:clrScheme>
-    <a:fontScheme name="Office">
-      <a:majorFont>
-        <a:latin typeface="Aptos Display" panose="02110004020202020204"/>
-        <a:ea typeface=""/>
-        <a:cs typeface=""/>
-        <a:font script="Jpan" typeface="游ゴシック Light"/>
-        <a:font script="Hang" typeface="맑은 고딕"/>
-        <a:font script="Hans" typeface="等线 Light"/>
-        <a:font script="Hant" typeface="新細明體"/>
-        <a:font script="Arab" typeface="Times New Roman"/>
-        <a:font script="Hebr" typeface="Times New Roman"/>
-        <a:font script="Thai" typeface="Angsana New"/>
-        <a:font script="Ethi" typeface="Nyala"/>
-        <a:font script="Beng" typeface="Vrinda"/>
-        <a:font script="Gujr" typeface="Shruti"/>
-        <a:font script="Khmr" typeface="MoolBoran"/>
-        <a:font script="Knda" typeface="Tunga"/>
-        <a:font script="Guru" typeface="Raavi"/>
-        <a:font script="Cans" typeface="Euphemia"/>
-        <a:font script="Cher" typeface="Plantagenet Cherokee"/>
-        <a:font script="Yiii" typeface="Microsoft Yi Baiti"/>
-        <a:font script="Tibt" typeface="Microsoft Himalaya"/>
-        <a:font script="Thaa" typeface="MV Boli"/>
-        <a:font script="Deva" typeface="Mangal"/>
-        <a:font script="Telu" typeface="Gautami"/>
-        <a:font script="Taml" typeface="Latha"/>
-        <a:font script="Syrc" typeface="Estrangelo Edessa"/>
-        <a:font script="Orya" typeface="Kalinga"/>
-        <a:font script="Mlym" typeface="Kartika"/>
-        <a:font script="Laoo" typeface="DokChampa"/>
-        <a:font script="Sinh" typeface="Iskoola Pota"/>
-        <a:font script="Mong" typeface="Mongolian Baiti"/>
-        <a:font script="Viet" typeface="Times New Roman"/>
-        <a:font script="Uigh" typeface="Microsoft Uighur"/>
-        <a:font script="Geor" typeface="Sylfaen"/>
-        <a:font script="Armn" typeface="Arial"/>
-        <a:font script="Bugi" typeface="Leelawadee UI"/>
-        <a:font script="Bopo" typeface="Microsoft JhengHei"/>
-        <a:font script="Java" typeface="Javanese Text"/>
-        <a:font script="Lisu" typeface="Segoe UI"/>
-        <a:font script="Mymr" typeface="Myanmar Text"/>
-        <a:font script="Nkoo" typeface="Ebrima"/>
-        <a:font script="Olck" typeface="Nirmala UI"/>
-        <a:font script="Osma" typeface="Ebrima"/>
-        <a:font script="Phag" typeface="Phagspa"/>
-        <a:font script="Syrn" typeface="Estrangelo Edessa"/>
-        <a:font script="Syrj" typeface="Estrangelo Edessa"/>
-        <a:font script="Syre" typeface="Estrangelo Edessa"/>
-        <a:font script="Sora" typeface="Nirmala UI"/>
-        <a:font script="Tale" typeface="Microsoft Tai Le"/>
-        <a:font script="Talu" typeface="Microsoft New Tai Lue"/>
-        <a:font script="Tfng" typeface="Ebrima"/>
-      </a:majorFont>
-      <a:minorFont>
-        <a:latin typeface="Aptos" panose="02110004020202020204"/>
-        <a:ea typeface=""/>
-        <a:cs typeface=""/>
-        <a:font script="Jpan" typeface="游ゴシック"/>
-        <a:font script="Hang" typeface="맑은 고딕"/>
-        <a:font script="Hans" typeface="等线"/>
-        <a:font script="Hant" typeface="新細明體"/>
-        <a:font script="Arab" typeface="Arial"/>
-        <a:font script="Hebr" typeface="Arial"/>
-        <a:font script="Thai" typeface="Cordia New"/>
-        <a:font script="Ethi" typeface="Nyala"/>
-        <a:font script="Beng" typeface="Vrinda"/>
-        <a:font script="Gujr" typeface="Shruti"/>
-        <a:font script="Khmr" typeface="DaunPenh"/>
-        <a:font script="Knda" typeface="Tunga"/>
-        <a:font script="Guru" typeface="Raavi"/>
-        <a:font script="Cans" typeface="Euphemia"/>
-        <a:font script="Cher" typeface="Plantagenet Cherokee"/>
-        <a:font script="Yiii" typeface="Microsoft Yi Baiti"/>
-        <a:font script="Tibt" typeface="Microsoft Himalaya"/>
-        <a:font script="Thaa" typeface="MV Boli"/>
-        <a:font script="Deva" typeface="Mangal"/>
-        <a:font script="Telu" typeface="Gautami"/>
-        <a:font script="Taml" typeface="Latha"/>
-        <a:font script="Syrc" typeface="Estrangelo Edessa"/>
-        <a:font script="Orya" typeface="Kalinga"/>
-        <a:font script="Mlym" typeface="Kartika"/>
-        <a:font script="Laoo" typeface="DokChampa"/>
-        <a:font script="Sinh" typeface="Iskoola Pota"/>
-        <a:font script="Mong" typeface="Mongolian Baiti"/>
-        <a:font script="Viet" typeface="Arial"/>
-        <a:font script="Uigh" typeface="Microsoft Uighur"/>
-        <a:font script="Geor" typeface="Sylfaen"/>
-        <a:font script="Armn" typeface="Arial"/>
-        <a:font script="Bugi" typeface="Leelawadee UI"/>
-        <a:font script="Bopo" typeface="Microsoft JhengHei"/>
-        <a:font script="Java" typeface="Javanese Text"/>
-        <a:font script="Lisu" typeface="Segoe UI"/>
-        <a:font script="Mymr" typeface="Myanmar Text"/>
-        <a:font script="Nkoo" typeface="Ebrima"/>
-        <a:font script="Olck" typeface="Nirmala UI"/>
-        <a:font script="Osma" typeface="Ebrima"/>
-        <a:font script="Phag" typeface="Phagspa"/>
-        <a:font script="Syrn" typeface="Estrangelo Edessa"/>
-        <a:font script="Syrj" typeface="Estrangelo Edessa"/>
-        <a:font script="Syre" typeface="Estrangelo Edessa"/>
-        <a:font script="Sora" typeface="Nirmala UI"/>
-        <a:font script="Tale" typeface="Microsoft Tai Le"/>
-        <a:font script="Talu" typeface="Microsoft New Tai Lue"/>
-        <a:font script="Tfng" typeface="Ebrima"/>
-      </a:minorFont>
-    </a:fontScheme>
-    <a:fmtScheme name="Office">
-      <a:fillStyleLst>
-        <a:solidFill>
-          <a:schemeClr val="phClr"/>
-        </a:solidFill>
-        <a:gradFill rotWithShape="1">
-          <a:gsLst>
-            <a:gs pos="0">
-              <a:schemeClr val="phClr">
-                <a:lumMod val="110000"/>
-                <a:satMod val="105000"/>
-                <a:tint val="67000"/>
-              </a:schemeClr>
-            </a:gs>
-            <a:gs pos="50000">
-              <a:schemeClr val="phClr">
-                <a:lumMod val="105000"/>
-                <a:satMod val="103000"/>
-                <a:tint val="73000"/>
-              </a:schemeClr>
-            </a:gs>
-            <a:gs pos="100000">
-              <a:schemeClr val="phClr">
-                <a:lumMod val="105000"/>
-                <a:satMod val="109000"/>
-                <a:tint val="81000"/>
-              </a:schemeClr>
-            </a:gs>
-          </a:gsLst>
-          <a:lin ang="5400000" scaled="0"/>
-        </a:gradFill>
-        <a:gradFill rotWithShape="1">
-          <a:gsLst>
-            <a:gs pos="0">
-              <a:schemeClr val="phClr">
-                <a:satMod val="103000"/>
-                <a:lumMod val="102000"/>
-                <a:tint val="94000"/>
-              </a:schemeClr>
-            </a:gs>
-            <a:gs pos="50000">
-              <a:schemeClr val="phClr">
-                <a:satMod val="110000"/>
-                <a:lumMod val="100000"/>
-                <a:shade val="100000"/>
-              </a:schemeClr>
-            </a:gs>
-            <a:gs pos="100000">
-              <a:schemeClr val="phClr">
-                <a:lumMod val="99000"/>
-                <a:satMod val="120000"/>
-                <a:shade val="78000"/>
-              </a:schemeClr>
-            </a:gs>
-          </a:gsLst>
-          <a:lin ang="5400000" scaled="0"/>
-        </a:gradFill>
-      </a:fillStyleLst>
-      <a:lnStyleLst>
-        <a:ln w="12700" cap="flat" cmpd="sng" algn="ctr">
-          <a:solidFill>
-            <a:schemeClr val="phClr"/>
-          </a:solidFill>
-          <a:prstDash val="solid"/>
-          <a:miter lim="800000"/>
-        </a:ln>
-        <a:ln w="19050" cap="flat" cmpd="sng" algn="ctr">
-          <a:solidFill>
-            <a:schemeClr val="phClr"/>
-          </a:solidFill>
-          <a:prstDash val="solid"/>
-          <a:miter lim="800000"/>
-        </a:ln>
-        <a:ln w="25400" cap="flat" cmpd="sng" algn="ctr">
-          <a:solidFill>
-            <a:schemeClr val="phClr"/>
-          </a:solidFill>
-          <a:prstDash val="solid"/>
-          <a:miter lim="800000"/>
-        </a:ln>
-      </a:lnStyleLst>
-      <a:effectStyleLst>
-        <a:effectStyle>
-          <a:effectLst/>
-        </a:effectStyle>
-        <a:effectStyle>
-          <a:effectLst/>
-        </a:effectStyle>
-        <a:effectStyle>
-          <a:effectLst>
-            <a:outerShdw blurRad="57150" dist="19050" dir="5400000" algn="ctr" rotWithShape="0">
-              <a:srgbClr val="000000">
-                <a:alpha val="63000"/>
-              </a:srgbClr>
-            </a:outerShdw>
-          </a:effectLst>
-        </a:effectStyle>
-      </a:effectStyleLst>
-      <a:bgFillStyleLst>
-        <a:solidFill>
-          <a:schemeClr val="phClr"/>
-        </a:solidFill>
-        <a:solidFill>
-          <a:schemeClr val="phClr">
-            <a:tint val="95000"/>
-            <a:satMod val="170000"/>
-          </a:schemeClr>
-        </a:solidFill>
-        <a:gradFill rotWithShape="1">
-          <a:gsLst>
-            <a:gs pos="0">
-              <a:schemeClr val="phClr">
-                <a:tint val="93000"/>
-                <a:satMod val="150000"/>
-                <a:shade val="98000"/>
-                <a:lumMod val="102000"/>
-              </a:schemeClr>
-            </a:gs>
-            <a:gs pos="50000">
-              <a:schemeClr val="phClr">
-                <a:tint val="98000"/>
-                <a:satMod val="130000"/>
-                <a:shade val="90000"/>
-                <a:lumMod val="103000"/>
-              </a:schemeClr>
-            </a:gs>
-            <a:gs pos="100000">
-              <a:schemeClr val="phClr">
-                <a:shade val="63000"/>
-                <a:satMod val="120000"/>
-              </a:schemeClr>
-            </a:gs>
-          </a:gsLst>
-          <a:lin ang="5400000" scaled="0"/>
-        </a:gradFill>
-      </a:bgFillStyleLst>
-    </a:fmtScheme>
-  </a:themeElements>
-  <a:objectDefaults>
-    <a:lnDef>
-      <a:spPr/>
-      <a:bodyPr/>
-      <a:lstStyle/>
-      <a:style>
-        <a:lnRef idx="2">
-          <a:schemeClr val="accent1"/>
-        </a:lnRef>
-        <a:fillRef idx="0">
-          <a:schemeClr val="accent1"/>
-        </a:fillRef>
-        <a:effectRef idx="1">
-          <a:schemeClr val="accent1"/>
-        </a:effectRef>
-        <a:fontRef idx="minor">
-          <a:schemeClr val="tx1"/>
-        </a:fontRef>
-      </a:style>
-    </a:lnDef>
-  </a:objectDefaults>
-  <a:extraClrSchemeLst/>
-  <a:extLst>
-    <a:ext uri="{05A4C25C-085E-4340-85A3-A5531E510DB2}">
-      <thm15:themeFamily xmlns:thm15="http://schemas.microsoft.com/office/thememl/2012/main" name="Office Theme" id="{2E142A2C-CD16-42D6-873A-C26D2A0506FA}" vid="{1BDDFF52-6CD6-40A5-AB3C-68EB2F1E4D0A}"/>
-    </a:ext>
-  </a:extLst>
-</a:theme>
 </file>